--- a/Specifications/dpgram/GUI-Screens.pptx
+++ b/Specifications/dpgram/GUI-Screens.pptx
@@ -261,7 +261,7 @@
           <a:p>
             <a:fld id="{6E783203-F72E-42D3-9F56-E7123AD26E23}" type="datetimeFigureOut">
               <a:rPr lang="en-US" smtClean="0"/>
-              <a:t>12/9/2024</a:t>
+              <a:t>8/7/2026</a:t>
             </a:fld>
             <a:endParaRPr lang="en-US"/>
           </a:p>
@@ -459,7 +459,7 @@
           <a:p>
             <a:fld id="{6E783203-F72E-42D3-9F56-E7123AD26E23}" type="datetimeFigureOut">
               <a:rPr lang="en-US" smtClean="0"/>
-              <a:t>12/9/2024</a:t>
+              <a:t>8/7/2026</a:t>
             </a:fld>
             <a:endParaRPr lang="en-US"/>
           </a:p>
@@ -667,7 +667,7 @@
           <a:p>
             <a:fld id="{6E783203-F72E-42D3-9F56-E7123AD26E23}" type="datetimeFigureOut">
               <a:rPr lang="en-US" smtClean="0"/>
-              <a:t>12/9/2024</a:t>
+              <a:t>8/7/2026</a:t>
             </a:fld>
             <a:endParaRPr lang="en-US"/>
           </a:p>
@@ -865,7 +865,7 @@
           <a:p>
             <a:fld id="{6E783203-F72E-42D3-9F56-E7123AD26E23}" type="datetimeFigureOut">
               <a:rPr lang="en-US" smtClean="0"/>
-              <a:t>12/9/2024</a:t>
+              <a:t>8/7/2026</a:t>
             </a:fld>
             <a:endParaRPr lang="en-US"/>
           </a:p>
@@ -1140,7 +1140,7 @@
           <a:p>
             <a:fld id="{6E783203-F72E-42D3-9F56-E7123AD26E23}" type="datetimeFigureOut">
               <a:rPr lang="en-US" smtClean="0"/>
-              <a:t>12/9/2024</a:t>
+              <a:t>8/7/2026</a:t>
             </a:fld>
             <a:endParaRPr lang="en-US"/>
           </a:p>
@@ -1405,7 +1405,7 @@
           <a:p>
             <a:fld id="{6E783203-F72E-42D3-9F56-E7123AD26E23}" type="datetimeFigureOut">
               <a:rPr lang="en-US" smtClean="0"/>
-              <a:t>12/9/2024</a:t>
+              <a:t>8/7/2026</a:t>
             </a:fld>
             <a:endParaRPr lang="en-US"/>
           </a:p>
@@ -1817,7 +1817,7 @@
           <a:p>
             <a:fld id="{6E783203-F72E-42D3-9F56-E7123AD26E23}" type="datetimeFigureOut">
               <a:rPr lang="en-US" smtClean="0"/>
-              <a:t>12/9/2024</a:t>
+              <a:t>8/7/2026</a:t>
             </a:fld>
             <a:endParaRPr lang="en-US"/>
           </a:p>
@@ -1958,7 +1958,7 @@
           <a:p>
             <a:fld id="{6E783203-F72E-42D3-9F56-E7123AD26E23}" type="datetimeFigureOut">
               <a:rPr lang="en-US" smtClean="0"/>
-              <a:t>12/9/2024</a:t>
+              <a:t>8/7/2026</a:t>
             </a:fld>
             <a:endParaRPr lang="en-US"/>
           </a:p>
@@ -2071,7 +2071,7 @@
           <a:p>
             <a:fld id="{6E783203-F72E-42D3-9F56-E7123AD26E23}" type="datetimeFigureOut">
               <a:rPr lang="en-US" smtClean="0"/>
-              <a:t>12/9/2024</a:t>
+              <a:t>8/7/2026</a:t>
             </a:fld>
             <a:endParaRPr lang="en-US"/>
           </a:p>
@@ -2382,7 +2382,7 @@
           <a:p>
             <a:fld id="{6E783203-F72E-42D3-9F56-E7123AD26E23}" type="datetimeFigureOut">
               <a:rPr lang="en-US" smtClean="0"/>
-              <a:t>12/9/2024</a:t>
+              <a:t>8/7/2026</a:t>
             </a:fld>
             <a:endParaRPr lang="en-US"/>
           </a:p>
@@ -2670,7 +2670,7 @@
           <a:p>
             <a:fld id="{6E783203-F72E-42D3-9F56-E7123AD26E23}" type="datetimeFigureOut">
               <a:rPr lang="en-US" smtClean="0"/>
-              <a:t>12/9/2024</a:t>
+              <a:t>8/7/2026</a:t>
             </a:fld>
             <a:endParaRPr lang="en-US"/>
           </a:p>
@@ -2911,7 +2911,7 @@
           <a:p>
             <a:fld id="{6E783203-F72E-42D3-9F56-E7123AD26E23}" type="datetimeFigureOut">
               <a:rPr lang="en-US" smtClean="0"/>
-              <a:t>12/9/2024</a:t>
+              <a:t>8/7/2026</a:t>
             </a:fld>
             <a:endParaRPr lang="en-US"/>
           </a:p>
@@ -3686,7 +3686,7 @@
                     <a:ea typeface="+mn-ea"/>
                     <a:cs typeface="+mn-cs"/>
                   </a:rPr>
-                  <a:t>Title: “Swept DPOAE” </a:t>
+                  <a:t>Title: “DPGRAM” </a:t>
                 </a:r>
                 <a:endParaRPr lang="en-US" b="1" dirty="0"/>
               </a:p>
@@ -3823,11 +3823,17 @@
           <p:cNvGraphicFramePr>
             <a:graphicFrameLocks noGrp="1"/>
           </p:cNvGraphicFramePr>
-          <p:nvPr/>
+          <p:nvPr>
+            <p:extLst>
+              <p:ext uri="{D42A27DB-BD31-4B8C-83A1-F6EECF244321}">
+                <p14:modId xmlns:p14="http://schemas.microsoft.com/office/powerpoint/2010/main" val="2845407314"/>
+              </p:ext>
+            </p:extLst>
+          </p:nvPr>
         </p:nvGraphicFramePr>
         <p:xfrm>
           <a:off x="3678348" y="1422249"/>
-          <a:ext cx="4795974" cy="3048000"/>
+          <a:ext cx="4795974" cy="2438400"/>
         </p:xfrm>
         <a:graphic>
           <a:graphicData uri="http://schemas.openxmlformats.org/drawingml/2006/table">
@@ -3924,7 +3930,7 @@
                             </a:schemeClr>
                           </a:solidFill>
                         </a:rPr>
-                        <a:t>Start Frequency [Hz]</a:t>
+                        <a:t>Frequency Array [ Hz[] ]</a:t>
                       </a:r>
                     </a:p>
                   </a:txBody>
@@ -3949,7 +3955,27 @@
                             </a:schemeClr>
                           </a:solidFill>
                         </a:rPr>
-                        <a:t>[start_F2]</a:t>
+                        <a:t>[</a:t>
+                      </a:r>
+                      <a:r>
+                        <a:rPr lang="en-US" sz="1400" dirty="0" err="1">
+                          <a:solidFill>
+                            <a:schemeClr val="bg2">
+                              <a:lumMod val="25000"/>
+                            </a:schemeClr>
+                          </a:solidFill>
+                        </a:rPr>
+                        <a:t>frequencyArray</a:t>
+                      </a:r>
+                      <a:r>
+                        <a:rPr lang="en-US" sz="1400" dirty="0">
+                          <a:solidFill>
+                            <a:schemeClr val="bg2">
+                              <a:lumMod val="25000"/>
+                            </a:schemeClr>
+                          </a:solidFill>
+                        </a:rPr>
+                        <a:t>]</a:t>
                       </a:r>
                     </a:p>
                   </a:txBody>
@@ -3964,63 +3990,6 @@
                 <a:extLst>
                   <a:ext uri="{0D108BD9-81ED-4DB2-BD59-A6C34878D82A}">
                     <a16:rowId xmlns:a16="http://schemas.microsoft.com/office/drawing/2014/main" val="1306087800"/>
-                  </a:ext>
-                </a:extLst>
-              </a:tr>
-              <a:tr h="281251">
-                <a:tc>
-                  <a:txBody>
-                    <a:bodyPr/>
-                    <a:lstStyle/>
-                    <a:p>
-                      <a:r>
-                        <a:rPr lang="en-US" sz="1400" dirty="0">
-                          <a:solidFill>
-                            <a:schemeClr val="bg2">
-                              <a:lumMod val="25000"/>
-                            </a:schemeClr>
-                          </a:solidFill>
-                        </a:rPr>
-                        <a:t>End Frequency [Hz]</a:t>
-                      </a:r>
-                    </a:p>
-                  </a:txBody>
-                  <a:tcPr>
-                    <a:solidFill>
-                      <a:schemeClr val="bg1">
-                        <a:lumMod val="85000"/>
-                      </a:schemeClr>
-                    </a:solidFill>
-                  </a:tcPr>
-                </a:tc>
-                <a:tc>
-                  <a:txBody>
-                    <a:bodyPr/>
-                    <a:lstStyle/>
-                    <a:p>
-                      <a:r>
-                        <a:rPr lang="en-US" sz="1400" dirty="0">
-                          <a:solidFill>
-                            <a:schemeClr val="bg2">
-                              <a:lumMod val="25000"/>
-                            </a:schemeClr>
-                          </a:solidFill>
-                        </a:rPr>
-                        <a:t>[end_F2]</a:t>
-                      </a:r>
-                    </a:p>
-                  </a:txBody>
-                  <a:tcPr>
-                    <a:solidFill>
-                      <a:schemeClr val="bg1">
-                        <a:lumMod val="85000"/>
-                      </a:schemeClr>
-                    </a:solidFill>
-                  </a:tcPr>
-                </a:tc>
-                <a:extLst>
-                  <a:ext uri="{0D108BD9-81ED-4DB2-BD59-A6C34878D82A}">
-                    <a16:rowId xmlns:a16="http://schemas.microsoft.com/office/drawing/2014/main" val="865106306"/>
                   </a:ext>
                 </a:extLst>
               </a:tr>
@@ -4192,63 +4161,6 @@
                 <a:extLst>
                   <a:ext uri="{0D108BD9-81ED-4DB2-BD59-A6C34878D82A}">
                     <a16:rowId xmlns:a16="http://schemas.microsoft.com/office/drawing/2014/main" val="328923842"/>
-                  </a:ext>
-                </a:extLst>
-              </a:tr>
-              <a:tr h="281251">
-                <a:tc>
-                  <a:txBody>
-                    <a:bodyPr/>
-                    <a:lstStyle/>
-                    <a:p>
-                      <a:r>
-                        <a:rPr lang="en-US" sz="1400" dirty="0">
-                          <a:solidFill>
-                            <a:schemeClr val="bg2">
-                              <a:lumMod val="25000"/>
-                            </a:schemeClr>
-                          </a:solidFill>
-                        </a:rPr>
-                        <a:t>Sweep Type</a:t>
-                      </a:r>
-                    </a:p>
-                  </a:txBody>
-                  <a:tcPr>
-                    <a:solidFill>
-                      <a:schemeClr val="bg1">
-                        <a:lumMod val="85000"/>
-                      </a:schemeClr>
-                    </a:solidFill>
-                  </a:tcPr>
-                </a:tc>
-                <a:tc>
-                  <a:txBody>
-                    <a:bodyPr/>
-                    <a:lstStyle/>
-                    <a:p>
-                      <a:r>
-                        <a:rPr lang="en-US" sz="1400" dirty="0">
-                          <a:solidFill>
-                            <a:schemeClr val="bg2">
-                              <a:lumMod val="25000"/>
-                            </a:schemeClr>
-                          </a:solidFill>
-                        </a:rPr>
-                        <a:t>[log/linear]</a:t>
-                      </a:r>
-                    </a:p>
-                  </a:txBody>
-                  <a:tcPr>
-                    <a:solidFill>
-                      <a:schemeClr val="bg1">
-                        <a:lumMod val="85000"/>
-                      </a:schemeClr>
-                    </a:solidFill>
-                  </a:tcPr>
-                </a:tc>
-                <a:extLst>
-                  <a:ext uri="{0D108BD9-81ED-4DB2-BD59-A6C34878D82A}">
-                    <a16:rowId xmlns:a16="http://schemas.microsoft.com/office/drawing/2014/main" val="205406906"/>
                   </a:ext>
                 </a:extLst>
               </a:tr>
@@ -4473,10 +4385,10 @@
       </p:grpSpPr>
       <p:grpSp>
         <p:nvGrpSpPr>
-          <p:cNvPr id="10" name="Group 9">
-            <a:extLst>
-              <a:ext uri="{FF2B5EF4-FFF2-40B4-BE49-F238E27FC236}">
-                <a16:creationId xmlns:a16="http://schemas.microsoft.com/office/drawing/2014/main" id="{93F3CD70-8AB9-EE62-C78C-0279C690B52E}"/>
+          <p:cNvPr id="20" name="Group 19">
+            <a:extLst>
+              <a:ext uri="{FF2B5EF4-FFF2-40B4-BE49-F238E27FC236}">
+                <a16:creationId xmlns:a16="http://schemas.microsoft.com/office/drawing/2014/main" id="{EDFEDDA7-6234-491A-9A13-1CE2400DD354}"/>
               </a:ext>
             </a:extLst>
           </p:cNvPr>
@@ -4487,16 +4399,407 @@
           <a:xfrm>
             <a:off x="3142442" y="120445"/>
             <a:ext cx="5867785" cy="6617110"/>
-            <a:chOff x="3142601" y="108155"/>
+            <a:chOff x="3142442" y="120445"/>
             <a:chExt cx="5867785" cy="6617110"/>
           </a:xfrm>
         </p:grpSpPr>
+        <p:grpSp>
+          <p:nvGrpSpPr>
+            <p:cNvPr id="10" name="Group 9">
+              <a:extLst>
+                <a:ext uri="{FF2B5EF4-FFF2-40B4-BE49-F238E27FC236}">
+                  <a16:creationId xmlns:a16="http://schemas.microsoft.com/office/drawing/2014/main" id="{93F3CD70-8AB9-EE62-C78C-0279C690B52E}"/>
+                </a:ext>
+              </a:extLst>
+            </p:cNvPr>
+            <p:cNvGrpSpPr/>
+            <p:nvPr/>
+          </p:nvGrpSpPr>
+          <p:grpSpPr>
+            <a:xfrm>
+              <a:off x="3142442" y="120445"/>
+              <a:ext cx="5867785" cy="6617110"/>
+              <a:chOff x="3142601" y="108155"/>
+              <a:chExt cx="5867785" cy="6617110"/>
+            </a:xfrm>
+          </p:grpSpPr>
+          <p:sp>
+            <p:nvSpPr>
+              <p:cNvPr id="9" name="Rectangle 8">
+                <a:extLst>
+                  <a:ext uri="{FF2B5EF4-FFF2-40B4-BE49-F238E27FC236}">
+                    <a16:creationId xmlns:a16="http://schemas.microsoft.com/office/drawing/2014/main" id="{F5BDA63C-9328-78B2-4677-9AFF8CE9EA6C}"/>
+                  </a:ext>
+                </a:extLst>
+              </p:cNvPr>
+              <p:cNvSpPr/>
+              <p:nvPr/>
+            </p:nvSpPr>
+            <p:spPr>
+              <a:xfrm>
+                <a:off x="5702860" y="5688862"/>
+                <a:ext cx="678810" cy="311009"/>
+              </a:xfrm>
+              <a:prstGeom prst="rect">
+                <a:avLst/>
+              </a:prstGeom>
+              <a:solidFill>
+                <a:srgbClr val="33AAEE"/>
+              </a:solidFill>
+              <a:ln>
+                <a:noFill/>
+              </a:ln>
+            </p:spPr>
+            <p:style>
+              <a:lnRef idx="2">
+                <a:schemeClr val="accent1">
+                  <a:shade val="15000"/>
+                </a:schemeClr>
+              </a:lnRef>
+              <a:fillRef idx="1">
+                <a:schemeClr val="accent1"/>
+              </a:fillRef>
+              <a:effectRef idx="0">
+                <a:schemeClr val="accent1"/>
+              </a:effectRef>
+              <a:fontRef idx="minor">
+                <a:schemeClr val="lt1"/>
+              </a:fontRef>
+            </p:style>
+            <p:txBody>
+              <a:bodyPr rtlCol="0" anchor="ctr"/>
+              <a:lstStyle/>
+              <a:p>
+                <a:pPr algn="ctr"/>
+                <a:endParaRPr lang="en-US"/>
+              </a:p>
+            </p:txBody>
+          </p:sp>
+          <p:grpSp>
+            <p:nvGrpSpPr>
+              <p:cNvPr id="75" name="Group 74">
+                <a:extLst>
+                  <a:ext uri="{FF2B5EF4-FFF2-40B4-BE49-F238E27FC236}">
+                    <a16:creationId xmlns:a16="http://schemas.microsoft.com/office/drawing/2014/main" id="{DDC83DA0-62D9-974D-9600-4C52BE739A87}"/>
+                  </a:ext>
+                </a:extLst>
+              </p:cNvPr>
+              <p:cNvGrpSpPr/>
+              <p:nvPr/>
+            </p:nvGrpSpPr>
+            <p:grpSpPr>
+              <a:xfrm>
+                <a:off x="3142601" y="108155"/>
+                <a:ext cx="5867785" cy="6617110"/>
+                <a:chOff x="3142601" y="108155"/>
+                <a:chExt cx="5867785" cy="6617110"/>
+              </a:xfrm>
+            </p:grpSpPr>
+            <p:pic>
+              <p:nvPicPr>
+                <p:cNvPr id="2" name="Picture 1">
+                  <a:extLst>
+                    <a:ext uri="{FF2B5EF4-FFF2-40B4-BE49-F238E27FC236}">
+                      <a16:creationId xmlns:a16="http://schemas.microsoft.com/office/drawing/2014/main" id="{7FB58AB6-829A-5A7F-E776-E0A9F06DD0A7}"/>
+                    </a:ext>
+                  </a:extLst>
+                </p:cNvPr>
+                <p:cNvPicPr>
+                  <a:picLocks noChangeAspect="1"/>
+                </p:cNvPicPr>
+                <p:nvPr/>
+              </p:nvPicPr>
+              <p:blipFill>
+                <a:blip r:embed="rId2"/>
+                <a:srcRect l="23569" t="12201" r="25360" b="18743"/>
+                <a:stretch/>
+              </p:blipFill>
+              <p:spPr>
+                <a:xfrm>
+                  <a:off x="5515897" y="2802194"/>
+                  <a:ext cx="1120877" cy="1145124"/>
+                </a:xfrm>
+                <a:prstGeom prst="rect">
+                  <a:avLst/>
+                </a:prstGeom>
+              </p:spPr>
+            </p:pic>
+            <p:pic>
+              <p:nvPicPr>
+                <p:cNvPr id="3" name="Picture 2">
+                  <a:extLst>
+                    <a:ext uri="{FF2B5EF4-FFF2-40B4-BE49-F238E27FC236}">
+                      <a16:creationId xmlns:a16="http://schemas.microsoft.com/office/drawing/2014/main" id="{C32AE24A-2742-0899-96C7-13F96630AD87}"/>
+                    </a:ext>
+                  </a:extLst>
+                </p:cNvPr>
+                <p:cNvPicPr>
+                  <a:picLocks noChangeAspect="1"/>
+                </p:cNvPicPr>
+                <p:nvPr/>
+              </p:nvPicPr>
+              <p:blipFill>
+                <a:blip r:embed="rId3"/>
+                <a:srcRect l="54980" t="72026" r="39565" b="21315"/>
+                <a:stretch/>
+              </p:blipFill>
+              <p:spPr>
+                <a:xfrm>
+                  <a:off x="3773277" y="5249275"/>
+                  <a:ext cx="412899" cy="569618"/>
+                </a:xfrm>
+                <a:prstGeom prst="rect">
+                  <a:avLst/>
+                </a:prstGeom>
+                <a:ln>
+                  <a:noFill/>
+                </a:ln>
+              </p:spPr>
+            </p:pic>
+            <p:pic>
+              <p:nvPicPr>
+                <p:cNvPr id="4" name="Picture 3">
+                  <a:extLst>
+                    <a:ext uri="{FF2B5EF4-FFF2-40B4-BE49-F238E27FC236}">
+                      <a16:creationId xmlns:a16="http://schemas.microsoft.com/office/drawing/2014/main" id="{70FE8C5A-8901-A5BE-3829-98BDE5CF9266}"/>
+                    </a:ext>
+                  </a:extLst>
+                </p:cNvPr>
+                <p:cNvPicPr>
+                  <a:picLocks noChangeAspect="1"/>
+                </p:cNvPicPr>
+                <p:nvPr/>
+              </p:nvPicPr>
+              <p:blipFill>
+                <a:blip r:embed="rId3"/>
+                <a:srcRect l="54980" t="72026" r="39565" b="21315"/>
+                <a:stretch/>
+              </p:blipFill>
+              <p:spPr>
+                <a:xfrm>
+                  <a:off x="5259288" y="5286129"/>
+                  <a:ext cx="443572" cy="532764"/>
+                </a:xfrm>
+                <a:prstGeom prst="rect">
+                  <a:avLst/>
+                </a:prstGeom>
+                <a:ln>
+                  <a:noFill/>
+                </a:ln>
+              </p:spPr>
+            </p:pic>
+            <p:sp>
+              <p:nvSpPr>
+                <p:cNvPr id="5" name="Rectangle 4">
+                  <a:extLst>
+                    <a:ext uri="{FF2B5EF4-FFF2-40B4-BE49-F238E27FC236}">
+                      <a16:creationId xmlns:a16="http://schemas.microsoft.com/office/drawing/2014/main" id="{5F54FB4C-98C5-F7F9-F1E3-1C4AC7E3AA5E}"/>
+                    </a:ext>
+                  </a:extLst>
+                </p:cNvPr>
+                <p:cNvSpPr/>
+                <p:nvPr/>
+              </p:nvSpPr>
+              <p:spPr>
+                <a:xfrm>
+                  <a:off x="3142601" y="108155"/>
+                  <a:ext cx="5867785" cy="6617110"/>
+                </a:xfrm>
+                <a:prstGeom prst="rect">
+                  <a:avLst/>
+                </a:prstGeom>
+                <a:solidFill>
+                  <a:schemeClr val="bg1"/>
+                </a:solidFill>
+                <a:ln>
+                  <a:solidFill>
+                    <a:schemeClr val="tx1"/>
+                  </a:solidFill>
+                </a:ln>
+              </p:spPr>
+              <p:style>
+                <a:lnRef idx="2">
+                  <a:schemeClr val="accent1">
+                    <a:shade val="15000"/>
+                  </a:schemeClr>
+                </a:lnRef>
+                <a:fillRef idx="1">
+                  <a:schemeClr val="accent1"/>
+                </a:fillRef>
+                <a:effectRef idx="0">
+                  <a:schemeClr val="accent1"/>
+                </a:effectRef>
+                <a:fontRef idx="minor">
+                  <a:schemeClr val="lt1"/>
+                </a:fontRef>
+              </p:style>
+              <p:txBody>
+                <a:bodyPr rtlCol="0" anchor="ctr"/>
+                <a:lstStyle/>
+                <a:p>
+                  <a:pPr algn="ctr"/>
+                  <a:endParaRPr lang="en-US" dirty="0"/>
+                </a:p>
+              </p:txBody>
+            </p:sp>
+            <p:sp>
+              <p:nvSpPr>
+                <p:cNvPr id="12" name="TextBox 11">
+                  <a:extLst>
+                    <a:ext uri="{FF2B5EF4-FFF2-40B4-BE49-F238E27FC236}">
+                      <a16:creationId xmlns:a16="http://schemas.microsoft.com/office/drawing/2014/main" id="{6EA42310-9A00-93CD-948C-141E7851ECB8}"/>
+                    </a:ext>
+                  </a:extLst>
+                </p:cNvPr>
+                <p:cNvSpPr txBox="1"/>
+                <p:nvPr/>
+              </p:nvSpPr>
+              <p:spPr>
+                <a:xfrm>
+                  <a:off x="3558540" y="776459"/>
+                  <a:ext cx="5161936" cy="369332"/>
+                </a:xfrm>
+                <a:prstGeom prst="rect">
+                  <a:avLst/>
+                </a:prstGeom>
+                <a:noFill/>
+              </p:spPr>
+              <p:txBody>
+                <a:bodyPr wrap="square" rtlCol="0">
+                  <a:spAutoFit/>
+                </a:bodyPr>
+                <a:lstStyle/>
+                <a:p>
+                  <a:pPr defTabSz="1453896">
+                    <a:spcAft>
+                      <a:spcPts val="600"/>
+                    </a:spcAft>
+                  </a:pPr>
+                  <a:r>
+                    <a:rPr lang="en-US" kern="1200" dirty="0">
+                      <a:solidFill>
+                        <a:schemeClr val="tx1"/>
+                      </a:solidFill>
+                      <a:latin typeface="+mn-lt"/>
+                      <a:ea typeface="+mn-ea"/>
+                      <a:cs typeface="+mn-cs"/>
+                    </a:rPr>
+                    <a:t>Instruction Text: “Exam in progress. Please wait.” </a:t>
+                  </a:r>
+                  <a:endParaRPr lang="en-US" sz="1100" dirty="0"/>
+                </a:p>
+              </p:txBody>
+            </p:sp>
+            <p:sp>
+              <p:nvSpPr>
+                <p:cNvPr id="14" name="TextBox 13">
+                  <a:extLst>
+                    <a:ext uri="{FF2B5EF4-FFF2-40B4-BE49-F238E27FC236}">
+                      <a16:creationId xmlns:a16="http://schemas.microsoft.com/office/drawing/2014/main" id="{8BB54681-FE79-B73A-094A-C212943AA606}"/>
+                    </a:ext>
+                  </a:extLst>
+                </p:cNvPr>
+                <p:cNvSpPr txBox="1"/>
+                <p:nvPr/>
+              </p:nvSpPr>
+              <p:spPr>
+                <a:xfrm>
+                  <a:off x="3539699" y="260573"/>
+                  <a:ext cx="5418480" cy="532775"/>
+                </a:xfrm>
+                <a:prstGeom prst="rect">
+                  <a:avLst/>
+                </a:prstGeom>
+                <a:noFill/>
+              </p:spPr>
+              <p:txBody>
+                <a:bodyPr wrap="square" rtlCol="0">
+                  <a:spAutoFit/>
+                </a:bodyPr>
+                <a:lstStyle/>
+                <a:p>
+                  <a:pPr defTabSz="1453896">
+                    <a:spcAft>
+                      <a:spcPts val="600"/>
+                    </a:spcAft>
+                  </a:pPr>
+                  <a:r>
+                    <a:rPr lang="en-US" sz="2862" b="1" kern="1200" dirty="0">
+                      <a:solidFill>
+                        <a:schemeClr val="tx1"/>
+                      </a:solidFill>
+                      <a:latin typeface="+mn-lt"/>
+                      <a:ea typeface="+mn-ea"/>
+                      <a:cs typeface="+mn-cs"/>
+                    </a:rPr>
+                    <a:t>Title: “DPGRAM” </a:t>
+                  </a:r>
+                  <a:endParaRPr lang="en-US" b="1" dirty="0"/>
+                </a:p>
+              </p:txBody>
+            </p:sp>
+            <p:sp>
+              <p:nvSpPr>
+                <p:cNvPr id="22" name="Rectangle 21">
+                  <a:extLst>
+                    <a:ext uri="{FF2B5EF4-FFF2-40B4-BE49-F238E27FC236}">
+                      <a16:creationId xmlns:a16="http://schemas.microsoft.com/office/drawing/2014/main" id="{40D183B3-1B53-FC95-AA75-79339CDC72AB}"/>
+                    </a:ext>
+                  </a:extLst>
+                </p:cNvPr>
+                <p:cNvSpPr/>
+                <p:nvPr/>
+              </p:nvSpPr>
+              <p:spPr>
+                <a:xfrm>
+                  <a:off x="6359256" y="3955038"/>
+                  <a:ext cx="1473800" cy="457900"/>
+                </a:xfrm>
+                <a:prstGeom prst="rect">
+                  <a:avLst/>
+                </a:prstGeom>
+                <a:solidFill>
+                  <a:schemeClr val="bg1"/>
+                </a:solidFill>
+                <a:ln>
+                  <a:solidFill>
+                    <a:schemeClr val="bg1"/>
+                  </a:solidFill>
+                </a:ln>
+              </p:spPr>
+              <p:style>
+                <a:lnRef idx="2">
+                  <a:schemeClr val="accent1">
+                    <a:shade val="15000"/>
+                  </a:schemeClr>
+                </a:lnRef>
+                <a:fillRef idx="1">
+                  <a:schemeClr val="accent1"/>
+                </a:fillRef>
+                <a:effectRef idx="0">
+                  <a:schemeClr val="accent1"/>
+                </a:effectRef>
+                <a:fontRef idx="minor">
+                  <a:schemeClr val="lt1"/>
+                </a:fontRef>
+              </p:style>
+              <p:txBody>
+                <a:bodyPr rtlCol="0" anchor="ctr"/>
+                <a:lstStyle/>
+                <a:p>
+                  <a:pPr algn="ctr"/>
+                  <a:endParaRPr lang="en-US"/>
+                </a:p>
+              </p:txBody>
+            </p:sp>
+          </p:grpSp>
+        </p:grpSp>
         <p:sp>
           <p:nvSpPr>
-            <p:cNvPr id="9" name="Rectangle 8">
+            <p:cNvPr id="11" name="Flowchart: Terminator 10">
               <a:extLst>
                 <a:ext uri="{FF2B5EF4-FFF2-40B4-BE49-F238E27FC236}">
-                  <a16:creationId xmlns:a16="http://schemas.microsoft.com/office/drawing/2014/main" id="{F5BDA63C-9328-78B2-4677-9AFF8CE9EA6C}"/>
+                  <a16:creationId xmlns:a16="http://schemas.microsoft.com/office/drawing/2014/main" id="{A66E0D3A-CA70-AF7E-1BD1-2CC8FEA906BF}"/>
                 </a:ext>
               </a:extLst>
             </p:cNvPr>
@@ -4505,10 +4808,122 @@
           </p:nvSpPr>
           <p:spPr>
             <a:xfrm>
-              <a:off x="5702860" y="5688862"/>
-              <a:ext cx="678810" cy="311009"/>
+              <a:off x="6825083" y="5856656"/>
+              <a:ext cx="1327450" cy="546260"/>
             </a:xfrm>
-            <a:prstGeom prst="rect">
+            <a:prstGeom prst="flowChartTerminator">
+              <a:avLst/>
+            </a:prstGeom>
+            <a:solidFill>
+              <a:schemeClr val="bg1">
+                <a:lumMod val="85000"/>
+              </a:schemeClr>
+            </a:solidFill>
+            <a:ln>
+              <a:noFill/>
+            </a:ln>
+            <a:effectLst>
+              <a:outerShdw blurRad="63500" sx="102000" sy="102000" algn="ctr" rotWithShape="0">
+                <a:prstClr val="black">
+                  <a:alpha val="40000"/>
+                </a:prstClr>
+              </a:outerShdw>
+            </a:effectLst>
+          </p:spPr>
+          <p:style>
+            <a:lnRef idx="2">
+              <a:schemeClr val="accent1">
+                <a:shade val="15000"/>
+              </a:schemeClr>
+            </a:lnRef>
+            <a:fillRef idx="1">
+              <a:schemeClr val="accent1"/>
+            </a:fillRef>
+            <a:effectRef idx="0">
+              <a:schemeClr val="accent1"/>
+            </a:effectRef>
+            <a:fontRef idx="minor">
+              <a:schemeClr val="lt1"/>
+            </a:fontRef>
+          </p:style>
+          <p:txBody>
+            <a:bodyPr rtlCol="0" anchor="ctr"/>
+            <a:lstStyle/>
+            <a:p>
+              <a:pPr algn="ctr"/>
+              <a:r>
+                <a:rPr lang="en-US" sz="2400" dirty="0"/>
+                <a:t>Next</a:t>
+              </a:r>
+              <a:endParaRPr lang="en-US" dirty="0"/>
+            </a:p>
+          </p:txBody>
+        </p:sp>
+        <p:sp>
+          <p:nvSpPr>
+            <p:cNvPr id="7" name="Rectangle: Rounded Corners 6">
+              <a:extLst>
+                <a:ext uri="{FF2B5EF4-FFF2-40B4-BE49-F238E27FC236}">
+                  <a16:creationId xmlns:a16="http://schemas.microsoft.com/office/drawing/2014/main" id="{BADCF599-63B3-BF6B-3598-BF7EC630439D}"/>
+                </a:ext>
+              </a:extLst>
+            </p:cNvPr>
+            <p:cNvSpPr/>
+            <p:nvPr/>
+          </p:nvSpPr>
+          <p:spPr>
+            <a:xfrm>
+              <a:off x="3678348" y="5065873"/>
+              <a:ext cx="4795974" cy="346332"/>
+            </a:xfrm>
+            <a:prstGeom prst="roundRect">
+              <a:avLst/>
+            </a:prstGeom>
+            <a:noFill/>
+          </p:spPr>
+          <p:style>
+            <a:lnRef idx="2">
+              <a:schemeClr val="accent1">
+                <a:shade val="15000"/>
+              </a:schemeClr>
+            </a:lnRef>
+            <a:fillRef idx="1">
+              <a:schemeClr val="accent1"/>
+            </a:fillRef>
+            <a:effectRef idx="0">
+              <a:schemeClr val="accent1"/>
+            </a:effectRef>
+            <a:fontRef idx="minor">
+              <a:schemeClr val="lt1"/>
+            </a:fontRef>
+          </p:style>
+          <p:txBody>
+            <a:bodyPr rtlCol="0" anchor="ctr"/>
+            <a:lstStyle/>
+            <a:p>
+              <a:pPr algn="ctr"/>
+              <a:endParaRPr lang="en-US" dirty="0"/>
+            </a:p>
+          </p:txBody>
+        </p:sp>
+        <p:sp>
+          <p:nvSpPr>
+            <p:cNvPr id="8" name="Rectangle: Rounded Corners 7">
+              <a:extLst>
+                <a:ext uri="{FF2B5EF4-FFF2-40B4-BE49-F238E27FC236}">
+                  <a16:creationId xmlns:a16="http://schemas.microsoft.com/office/drawing/2014/main" id="{8B3C557B-FF12-1CD9-B572-93C7A973DB0D}"/>
+                </a:ext>
+              </a:extLst>
+            </p:cNvPr>
+            <p:cNvSpPr/>
+            <p:nvPr/>
+          </p:nvSpPr>
+          <p:spPr>
+            <a:xfrm>
+              <a:off x="3678348" y="5061494"/>
+              <a:ext cx="3818007" cy="346332"/>
+            </a:xfrm>
+            <a:prstGeom prst="roundRect">
               <a:avLst/>
             </a:prstGeom>
             <a:solidFill>
@@ -4543,1284 +4958,756 @@
             </a:p>
           </p:txBody>
         </p:sp>
-        <p:grpSp>
-          <p:nvGrpSpPr>
-            <p:cNvPr id="75" name="Group 74">
+        <p:sp>
+          <p:nvSpPr>
+            <p:cNvPr id="16" name="TextBox 15">
               <a:extLst>
                 <a:ext uri="{FF2B5EF4-FFF2-40B4-BE49-F238E27FC236}">
-                  <a16:creationId xmlns:a16="http://schemas.microsoft.com/office/drawing/2014/main" id="{DDC83DA0-62D9-974D-9600-4C52BE739A87}"/>
+                  <a16:creationId xmlns:a16="http://schemas.microsoft.com/office/drawing/2014/main" id="{C9F218D7-B754-E6DA-9A39-41A7CB1FDBAD}"/>
                 </a:ext>
               </a:extLst>
             </p:cNvPr>
-            <p:cNvGrpSpPr/>
+            <p:cNvSpPr txBox="1"/>
             <p:nvPr/>
-          </p:nvGrpSpPr>
-          <p:grpSpPr>
+          </p:nvSpPr>
+          <p:spPr>
             <a:xfrm>
-              <a:off x="3142601" y="108155"/>
-              <a:ext cx="5867785" cy="6617110"/>
-              <a:chOff x="3142601" y="108155"/>
-              <a:chExt cx="5867785" cy="6617110"/>
+              <a:off x="5551295" y="4759196"/>
+              <a:ext cx="1057405" cy="307777"/>
             </a:xfrm>
-          </p:grpSpPr>
-          <p:pic>
-            <p:nvPicPr>
-              <p:cNvPr id="2" name="Picture 1">
-                <a:extLst>
-                  <a:ext uri="{FF2B5EF4-FFF2-40B4-BE49-F238E27FC236}">
-                    <a16:creationId xmlns:a16="http://schemas.microsoft.com/office/drawing/2014/main" id="{7FB58AB6-829A-5A7F-E776-E0A9F06DD0A7}"/>
-                  </a:ext>
-                </a:extLst>
-              </p:cNvPr>
-              <p:cNvPicPr>
-                <a:picLocks noChangeAspect="1"/>
-              </p:cNvPicPr>
-              <p:nvPr/>
-            </p:nvPicPr>
-            <p:blipFill>
-              <a:blip r:embed="rId2"/>
-              <a:srcRect l="23569" t="12201" r="25360" b="18743"/>
-              <a:stretch/>
-            </p:blipFill>
-            <p:spPr>
-              <a:xfrm>
-                <a:off x="5515897" y="2802194"/>
-                <a:ext cx="1120877" cy="1145124"/>
-              </a:xfrm>
-              <a:prstGeom prst="rect">
-                <a:avLst/>
-              </a:prstGeom>
-            </p:spPr>
-          </p:pic>
-          <p:pic>
-            <p:nvPicPr>
-              <p:cNvPr id="3" name="Picture 2">
-                <a:extLst>
-                  <a:ext uri="{FF2B5EF4-FFF2-40B4-BE49-F238E27FC236}">
-                    <a16:creationId xmlns:a16="http://schemas.microsoft.com/office/drawing/2014/main" id="{C32AE24A-2742-0899-96C7-13F96630AD87}"/>
-                  </a:ext>
-                </a:extLst>
-              </p:cNvPr>
-              <p:cNvPicPr>
-                <a:picLocks noChangeAspect="1"/>
-              </p:cNvPicPr>
-              <p:nvPr/>
-            </p:nvPicPr>
-            <p:blipFill>
-              <a:blip r:embed="rId3"/>
-              <a:srcRect l="54980" t="72026" r="39565" b="21315"/>
-              <a:stretch/>
-            </p:blipFill>
-            <p:spPr>
-              <a:xfrm>
-                <a:off x="3773277" y="5249275"/>
-                <a:ext cx="412899" cy="569618"/>
-              </a:xfrm>
-              <a:prstGeom prst="rect">
-                <a:avLst/>
-              </a:prstGeom>
-              <a:ln>
-                <a:noFill/>
-              </a:ln>
-            </p:spPr>
-          </p:pic>
-          <p:pic>
-            <p:nvPicPr>
-              <p:cNvPr id="4" name="Picture 3">
-                <a:extLst>
-                  <a:ext uri="{FF2B5EF4-FFF2-40B4-BE49-F238E27FC236}">
-                    <a16:creationId xmlns:a16="http://schemas.microsoft.com/office/drawing/2014/main" id="{70FE8C5A-8901-A5BE-3829-98BDE5CF9266}"/>
-                  </a:ext>
-                </a:extLst>
-              </p:cNvPr>
-              <p:cNvPicPr>
-                <a:picLocks noChangeAspect="1"/>
-              </p:cNvPicPr>
-              <p:nvPr/>
-            </p:nvPicPr>
-            <p:blipFill>
-              <a:blip r:embed="rId3"/>
-              <a:srcRect l="54980" t="72026" r="39565" b="21315"/>
-              <a:stretch/>
-            </p:blipFill>
-            <p:spPr>
-              <a:xfrm>
-                <a:off x="5259288" y="5286129"/>
-                <a:ext cx="443572" cy="532764"/>
-              </a:xfrm>
-              <a:prstGeom prst="rect">
-                <a:avLst/>
-              </a:prstGeom>
-              <a:ln>
-                <a:noFill/>
-              </a:ln>
-            </p:spPr>
-          </p:pic>
-          <p:sp>
-            <p:nvSpPr>
-              <p:cNvPr id="5" name="Rectangle 4">
-                <a:extLst>
-                  <a:ext uri="{FF2B5EF4-FFF2-40B4-BE49-F238E27FC236}">
-                    <a16:creationId xmlns:a16="http://schemas.microsoft.com/office/drawing/2014/main" id="{5F54FB4C-98C5-F7F9-F1E3-1C4AC7E3AA5E}"/>
-                  </a:ext>
-                </a:extLst>
-              </p:cNvPr>
-              <p:cNvSpPr/>
-              <p:nvPr/>
-            </p:nvSpPr>
-            <p:spPr>
-              <a:xfrm>
-                <a:off x="3142601" y="108155"/>
-                <a:ext cx="5867785" cy="6617110"/>
-              </a:xfrm>
-              <a:prstGeom prst="rect">
-                <a:avLst/>
-              </a:prstGeom>
+            <a:prstGeom prst="rect">
+              <a:avLst/>
+            </a:prstGeom>
+            <a:noFill/>
+          </p:spPr>
+          <p:txBody>
+            <a:bodyPr wrap="none" rtlCol="0">
+              <a:spAutoFit/>
+            </a:bodyPr>
+            <a:lstStyle/>
+            <a:p>
+              <a:r>
+                <a:rPr lang="en-US" sz="1400" dirty="0"/>
+                <a:t>Completed</a:t>
+              </a:r>
+            </a:p>
+          </p:txBody>
+        </p:sp>
+        <p:sp>
+          <p:nvSpPr>
+            <p:cNvPr id="6" name="Flowchart: Terminator 5">
+              <a:extLst>
+                <a:ext uri="{FF2B5EF4-FFF2-40B4-BE49-F238E27FC236}">
+                  <a16:creationId xmlns:a16="http://schemas.microsoft.com/office/drawing/2014/main" id="{7834EFD9-8B62-312B-24B4-9CC41DC25D38}"/>
+                </a:ext>
+              </a:extLst>
+            </p:cNvPr>
+            <p:cNvSpPr/>
+            <p:nvPr/>
+          </p:nvSpPr>
+          <p:spPr>
+            <a:xfrm>
+              <a:off x="4039468" y="5856656"/>
+              <a:ext cx="1327450" cy="546260"/>
+            </a:xfrm>
+            <a:prstGeom prst="flowChartTerminator">
+              <a:avLst/>
+            </a:prstGeom>
+            <a:solidFill>
+              <a:srgbClr val="FF0000"/>
+            </a:solidFill>
+            <a:ln>
+              <a:noFill/>
+            </a:ln>
+            <a:effectLst>
+              <a:outerShdw blurRad="63500" sx="102000" sy="102000" algn="ctr" rotWithShape="0">
+                <a:prstClr val="black">
+                  <a:alpha val="40000"/>
+                </a:prstClr>
+              </a:outerShdw>
+            </a:effectLst>
+          </p:spPr>
+          <p:style>
+            <a:lnRef idx="2">
+              <a:schemeClr val="accent1">
+                <a:shade val="15000"/>
+              </a:schemeClr>
+            </a:lnRef>
+            <a:fillRef idx="1">
+              <a:schemeClr val="accent1"/>
+            </a:fillRef>
+            <a:effectRef idx="0">
+              <a:schemeClr val="accent1"/>
+            </a:effectRef>
+            <a:fontRef idx="minor">
+              <a:schemeClr val="lt1"/>
+            </a:fontRef>
+          </p:style>
+          <p:txBody>
+            <a:bodyPr rtlCol="0" anchor="ctr"/>
+            <a:lstStyle/>
+            <a:p>
+              <a:pPr algn="ctr"/>
+              <a:r>
+                <a:rPr lang="en-US" sz="2400" dirty="0"/>
+                <a:t>Abort</a:t>
+              </a:r>
+              <a:endParaRPr lang="en-US" dirty="0"/>
+            </a:p>
+          </p:txBody>
+        </p:sp>
+        <p:pic>
+          <p:nvPicPr>
+            <p:cNvPr id="17" name="Picture 16">
+              <a:extLst>
+                <a:ext uri="{FF2B5EF4-FFF2-40B4-BE49-F238E27FC236}">
+                  <a16:creationId xmlns:a16="http://schemas.microsoft.com/office/drawing/2014/main" id="{896BA1FF-F271-64E6-68D6-A07375F18B62}"/>
+                </a:ext>
+              </a:extLst>
+            </p:cNvPr>
+            <p:cNvPicPr>
+              <a:picLocks noChangeAspect="1"/>
+            </p:cNvPicPr>
+            <p:nvPr/>
+          </p:nvPicPr>
+          <p:blipFill>
+            <a:blip r:embed="rId4">
+              <a:extLst>
+                <a:ext uri="{28A0092B-C50C-407E-A947-70E740481C1C}">
+                  <a14:useLocalDpi xmlns:a14="http://schemas.microsoft.com/office/drawing/2010/main" val="0"/>
+                </a:ext>
+              </a:extLst>
+            </a:blip>
+            <a:srcRect l="575" t="21456" r="6284" b="447"/>
+            <a:stretch/>
+          </p:blipFill>
+          <p:spPr>
+            <a:xfrm>
+              <a:off x="4039468" y="1491716"/>
+              <a:ext cx="3957220" cy="2987416"/>
+            </a:xfrm>
+            <a:prstGeom prst="rect">
+              <a:avLst/>
+            </a:prstGeom>
+            <a:ln>
+              <a:solidFill>
+                <a:schemeClr val="tx1"/>
+              </a:solidFill>
+            </a:ln>
+          </p:spPr>
+        </p:pic>
+        <p:sp>
+          <p:nvSpPr>
+            <p:cNvPr id="13" name="Rectangle 12">
+              <a:extLst>
+                <a:ext uri="{FF2B5EF4-FFF2-40B4-BE49-F238E27FC236}">
+                  <a16:creationId xmlns:a16="http://schemas.microsoft.com/office/drawing/2014/main" id="{2565031A-1428-14DC-3301-DAAEC6E27F92}"/>
+                </a:ext>
+              </a:extLst>
+            </p:cNvPr>
+            <p:cNvSpPr/>
+            <p:nvPr/>
+          </p:nvSpPr>
+          <p:spPr>
+            <a:xfrm>
+              <a:off x="6600074" y="1594980"/>
+              <a:ext cx="1196282" cy="640483"/>
+            </a:xfrm>
+            <a:prstGeom prst="rect">
+              <a:avLst/>
+            </a:prstGeom>
+            <a:solidFill>
+              <a:schemeClr val="bg1"/>
+            </a:solidFill>
+            <a:ln>
+              <a:solidFill>
+                <a:schemeClr val="bg1">
+                  <a:lumMod val="75000"/>
+                </a:schemeClr>
+              </a:solidFill>
+            </a:ln>
+          </p:spPr>
+          <p:style>
+            <a:lnRef idx="2">
+              <a:schemeClr val="accent1">
+                <a:shade val="15000"/>
+              </a:schemeClr>
+            </a:lnRef>
+            <a:fillRef idx="1">
+              <a:schemeClr val="accent1"/>
+            </a:fillRef>
+            <a:effectRef idx="0">
+              <a:schemeClr val="accent1"/>
+            </a:effectRef>
+            <a:fontRef idx="minor">
+              <a:schemeClr val="lt1"/>
+            </a:fontRef>
+          </p:style>
+          <p:txBody>
+            <a:bodyPr rtlCol="0" anchor="ctr"/>
+            <a:lstStyle/>
+            <a:p>
+              <a:r>
+                <a:rPr lang="en-US" sz="900" b="1" dirty="0">
+                  <a:solidFill>
+                    <a:srgbClr val="0070C0"/>
+                  </a:solidFill>
+                </a:rPr>
+                <a:t>O          </a:t>
+              </a:r>
+              <a:r>
+                <a:rPr lang="en-US" sz="900" b="1" dirty="0">
+                  <a:solidFill>
+                    <a:schemeClr val="tx1"/>
+                  </a:solidFill>
+                </a:rPr>
+                <a:t>DPOAE</a:t>
+              </a:r>
+              <a:endParaRPr lang="en-US" sz="900" b="1" dirty="0">
+                <a:solidFill>
+                  <a:srgbClr val="0070C0"/>
+                </a:solidFill>
+              </a:endParaRPr>
+            </a:p>
+            <a:p>
+              <a:endParaRPr lang="en-US" sz="900" dirty="0">
+                <a:solidFill>
+                  <a:srgbClr val="0070C0"/>
+                </a:solidFill>
+              </a:endParaRPr>
+            </a:p>
+            <a:p>
+              <a:r>
+                <a:rPr lang="en-US" sz="900" b="1" dirty="0">
+                  <a:solidFill>
+                    <a:srgbClr val="C00000"/>
+                  </a:solidFill>
+                </a:rPr>
+                <a:t>X          </a:t>
+              </a:r>
+              <a:r>
+                <a:rPr lang="en-US" sz="900" b="1" dirty="0">
+                  <a:solidFill>
+                    <a:schemeClr val="tx1"/>
+                  </a:solidFill>
+                </a:rPr>
+                <a:t>NOISE</a:t>
+              </a:r>
+              <a:endParaRPr lang="en-US" sz="900" b="1" dirty="0">
+                <a:solidFill>
+                  <a:srgbClr val="C00000"/>
+                </a:solidFill>
+              </a:endParaRPr>
+            </a:p>
+          </p:txBody>
+        </p:sp>
+        <p:sp>
+          <p:nvSpPr>
+            <p:cNvPr id="15" name="Rectangle 14">
+              <a:extLst>
+                <a:ext uri="{FF2B5EF4-FFF2-40B4-BE49-F238E27FC236}">
+                  <a16:creationId xmlns:a16="http://schemas.microsoft.com/office/drawing/2014/main" id="{BC400713-2B34-C58C-7C3C-66C1693E2DA5}"/>
+                </a:ext>
+              </a:extLst>
+            </p:cNvPr>
+            <p:cNvSpPr/>
+            <p:nvPr/>
+          </p:nvSpPr>
+          <p:spPr>
+            <a:xfrm>
+              <a:off x="4095278" y="3252159"/>
+              <a:ext cx="189782" cy="854015"/>
+            </a:xfrm>
+            <a:prstGeom prst="rect">
+              <a:avLst/>
+            </a:prstGeom>
+            <a:solidFill>
+              <a:schemeClr val="bg1"/>
+            </a:solidFill>
+            <a:ln>
               <a:solidFill>
                 <a:schemeClr val="bg1"/>
               </a:solidFill>
-              <a:ln>
-                <a:solidFill>
-                  <a:schemeClr val="tx1"/>
-                </a:solidFill>
-              </a:ln>
-            </p:spPr>
-            <p:style>
-              <a:lnRef idx="2">
-                <a:schemeClr val="accent1">
-                  <a:shade val="15000"/>
-                </a:schemeClr>
-              </a:lnRef>
-              <a:fillRef idx="1">
-                <a:schemeClr val="accent1"/>
-              </a:fillRef>
-              <a:effectRef idx="0">
-                <a:schemeClr val="accent1"/>
-              </a:effectRef>
-              <a:fontRef idx="minor">
-                <a:schemeClr val="lt1"/>
-              </a:fontRef>
-            </p:style>
-            <p:txBody>
-              <a:bodyPr rtlCol="0" anchor="ctr"/>
-              <a:lstStyle/>
-              <a:p>
-                <a:pPr algn="ctr"/>
-                <a:endParaRPr lang="en-US" dirty="0"/>
-              </a:p>
-            </p:txBody>
-          </p:sp>
-          <p:sp>
-            <p:nvSpPr>
-              <p:cNvPr id="12" name="TextBox 11">
-                <a:extLst>
-                  <a:ext uri="{FF2B5EF4-FFF2-40B4-BE49-F238E27FC236}">
-                    <a16:creationId xmlns:a16="http://schemas.microsoft.com/office/drawing/2014/main" id="{6EA42310-9A00-93CD-948C-141E7851ECB8}"/>
-                  </a:ext>
-                </a:extLst>
-              </p:cNvPr>
-              <p:cNvSpPr txBox="1"/>
-              <p:nvPr/>
-            </p:nvSpPr>
-            <p:spPr>
-              <a:xfrm>
-                <a:off x="3558540" y="776459"/>
-                <a:ext cx="5161936" cy="369332"/>
-              </a:xfrm>
-              <a:prstGeom prst="rect">
-                <a:avLst/>
-              </a:prstGeom>
-              <a:noFill/>
-            </p:spPr>
-            <p:txBody>
-              <a:bodyPr wrap="square" rtlCol="0">
-                <a:spAutoFit/>
-              </a:bodyPr>
-              <a:lstStyle/>
-              <a:p>
-                <a:pPr defTabSz="1453896">
-                  <a:spcAft>
-                    <a:spcPts val="600"/>
-                  </a:spcAft>
-                </a:pPr>
-                <a:r>
-                  <a:rPr lang="en-US" kern="1200" dirty="0">
-                    <a:solidFill>
-                      <a:schemeClr val="tx1"/>
-                    </a:solidFill>
-                    <a:latin typeface="+mn-lt"/>
-                    <a:ea typeface="+mn-ea"/>
-                    <a:cs typeface="+mn-cs"/>
-                  </a:rPr>
-                  <a:t>Instruction Text: “Exam in progress. Please wait.” </a:t>
-                </a:r>
-                <a:endParaRPr lang="en-US" sz="1100" dirty="0"/>
-              </a:p>
-            </p:txBody>
-          </p:sp>
-          <p:sp>
-            <p:nvSpPr>
-              <p:cNvPr id="14" name="TextBox 13">
-                <a:extLst>
-                  <a:ext uri="{FF2B5EF4-FFF2-40B4-BE49-F238E27FC236}">
-                    <a16:creationId xmlns:a16="http://schemas.microsoft.com/office/drawing/2014/main" id="{8BB54681-FE79-B73A-094A-C212943AA606}"/>
-                  </a:ext>
-                </a:extLst>
-              </p:cNvPr>
-              <p:cNvSpPr txBox="1"/>
-              <p:nvPr/>
-            </p:nvSpPr>
-            <p:spPr>
-              <a:xfrm>
-                <a:off x="3539699" y="260573"/>
-                <a:ext cx="5418480" cy="532775"/>
-              </a:xfrm>
-              <a:prstGeom prst="rect">
-                <a:avLst/>
-              </a:prstGeom>
-              <a:noFill/>
-            </p:spPr>
-            <p:txBody>
-              <a:bodyPr wrap="square" rtlCol="0">
-                <a:spAutoFit/>
-              </a:bodyPr>
-              <a:lstStyle/>
-              <a:p>
-                <a:pPr defTabSz="1453896">
-                  <a:spcAft>
-                    <a:spcPts val="600"/>
-                  </a:spcAft>
-                </a:pPr>
-                <a:r>
-                  <a:rPr lang="en-US" sz="2862" b="1" kern="1200" dirty="0">
-                    <a:solidFill>
-                      <a:schemeClr val="tx1"/>
-                    </a:solidFill>
-                    <a:latin typeface="+mn-lt"/>
-                    <a:ea typeface="+mn-ea"/>
-                    <a:cs typeface="+mn-cs"/>
-                  </a:rPr>
-                  <a:t>Title: “Swept DPOAE” </a:t>
-                </a:r>
-                <a:endParaRPr lang="en-US" b="1" dirty="0"/>
-              </a:p>
-            </p:txBody>
-          </p:sp>
-          <p:sp>
-            <p:nvSpPr>
-              <p:cNvPr id="22" name="Rectangle 21">
-                <a:extLst>
-                  <a:ext uri="{FF2B5EF4-FFF2-40B4-BE49-F238E27FC236}">
-                    <a16:creationId xmlns:a16="http://schemas.microsoft.com/office/drawing/2014/main" id="{40D183B3-1B53-FC95-AA75-79339CDC72AB}"/>
-                  </a:ext>
-                </a:extLst>
-              </p:cNvPr>
-              <p:cNvSpPr/>
-              <p:nvPr/>
-            </p:nvSpPr>
-            <p:spPr>
-              <a:xfrm>
-                <a:off x="6359256" y="3955038"/>
-                <a:ext cx="1473800" cy="457900"/>
-              </a:xfrm>
-              <a:prstGeom prst="rect">
-                <a:avLst/>
-              </a:prstGeom>
+            </a:ln>
+          </p:spPr>
+          <p:style>
+            <a:lnRef idx="2">
+              <a:schemeClr val="accent1">
+                <a:shade val="15000"/>
+              </a:schemeClr>
+            </a:lnRef>
+            <a:fillRef idx="1">
+              <a:schemeClr val="accent1"/>
+            </a:fillRef>
+            <a:effectRef idx="0">
+              <a:schemeClr val="accent1"/>
+            </a:effectRef>
+            <a:fontRef idx="minor">
+              <a:schemeClr val="lt1"/>
+            </a:fontRef>
+          </p:style>
+          <p:txBody>
+            <a:bodyPr rtlCol="0" anchor="ctr"/>
+            <a:lstStyle/>
+            <a:p>
+              <a:pPr algn="ctr"/>
+              <a:endParaRPr lang="en-US"/>
+            </a:p>
+          </p:txBody>
+        </p:sp>
+        <p:sp>
+          <p:nvSpPr>
+            <p:cNvPr id="24" name="Rectangle 23">
+              <a:extLst>
+                <a:ext uri="{FF2B5EF4-FFF2-40B4-BE49-F238E27FC236}">
+                  <a16:creationId xmlns:a16="http://schemas.microsoft.com/office/drawing/2014/main" id="{B156EBAE-98EF-52EB-2209-ED36847F6E12}"/>
+                </a:ext>
+              </a:extLst>
+            </p:cNvPr>
+            <p:cNvSpPr/>
+            <p:nvPr/>
+          </p:nvSpPr>
+          <p:spPr>
+            <a:xfrm>
+              <a:off x="4073972" y="1777042"/>
+              <a:ext cx="245592" cy="1470738"/>
+            </a:xfrm>
+            <a:prstGeom prst="rect">
+              <a:avLst/>
+            </a:prstGeom>
+            <a:solidFill>
+              <a:schemeClr val="bg1"/>
+            </a:solidFill>
+            <a:ln>
               <a:solidFill>
                 <a:schemeClr val="bg1"/>
               </a:solidFill>
-              <a:ln>
-                <a:solidFill>
-                  <a:schemeClr val="bg1"/>
-                </a:solidFill>
-              </a:ln>
-            </p:spPr>
-            <p:style>
-              <a:lnRef idx="2">
-                <a:schemeClr val="accent1">
-                  <a:shade val="15000"/>
-                </a:schemeClr>
-              </a:lnRef>
-              <a:fillRef idx="1">
-                <a:schemeClr val="accent1"/>
-              </a:fillRef>
-              <a:effectRef idx="0">
-                <a:schemeClr val="accent1"/>
-              </a:effectRef>
-              <a:fontRef idx="minor">
-                <a:schemeClr val="lt1"/>
-              </a:fontRef>
-            </p:style>
-            <p:txBody>
-              <a:bodyPr rtlCol="0" anchor="ctr"/>
-              <a:lstStyle/>
-              <a:p>
-                <a:pPr algn="ctr"/>
-                <a:endParaRPr lang="en-US"/>
-              </a:p>
-            </p:txBody>
-          </p:sp>
-        </p:grpSp>
-      </p:grpSp>
-      <p:sp>
-        <p:nvSpPr>
-          <p:cNvPr id="11" name="Flowchart: Terminator 10">
-            <a:extLst>
-              <a:ext uri="{FF2B5EF4-FFF2-40B4-BE49-F238E27FC236}">
-                <a16:creationId xmlns:a16="http://schemas.microsoft.com/office/drawing/2014/main" id="{A66E0D3A-CA70-AF7E-1BD1-2CC8FEA906BF}"/>
-              </a:ext>
-            </a:extLst>
-          </p:cNvPr>
-          <p:cNvSpPr/>
-          <p:nvPr/>
-        </p:nvSpPr>
-        <p:spPr>
-          <a:xfrm>
-            <a:off x="6825083" y="5856656"/>
-            <a:ext cx="1327450" cy="546260"/>
-          </a:xfrm>
-          <a:prstGeom prst="flowChartTerminator">
-            <a:avLst/>
-          </a:prstGeom>
-          <a:solidFill>
-            <a:schemeClr val="bg1">
-              <a:lumMod val="85000"/>
-            </a:schemeClr>
-          </a:solidFill>
-          <a:ln>
-            <a:noFill/>
-          </a:ln>
-          <a:effectLst>
-            <a:outerShdw blurRad="63500" sx="102000" sy="102000" algn="ctr" rotWithShape="0">
-              <a:prstClr val="black">
-                <a:alpha val="40000"/>
-              </a:prstClr>
-            </a:outerShdw>
-          </a:effectLst>
-        </p:spPr>
-        <p:style>
-          <a:lnRef idx="2">
-            <a:schemeClr val="accent1">
-              <a:shade val="15000"/>
-            </a:schemeClr>
-          </a:lnRef>
-          <a:fillRef idx="1">
-            <a:schemeClr val="accent1"/>
-          </a:fillRef>
-          <a:effectRef idx="0">
-            <a:schemeClr val="accent1"/>
-          </a:effectRef>
-          <a:fontRef idx="minor">
-            <a:schemeClr val="lt1"/>
-          </a:fontRef>
-        </p:style>
-        <p:txBody>
-          <a:bodyPr rtlCol="0" anchor="ctr"/>
-          <a:lstStyle/>
-          <a:p>
-            <a:pPr algn="ctr"/>
-            <a:r>
-              <a:rPr lang="en-US" sz="2400" dirty="0"/>
-              <a:t>Next</a:t>
-            </a:r>
-            <a:endParaRPr lang="en-US" dirty="0"/>
-          </a:p>
-        </p:txBody>
-      </p:sp>
-      <p:sp>
-        <p:nvSpPr>
-          <p:cNvPr id="7" name="Rectangle: Rounded Corners 6">
-            <a:extLst>
-              <a:ext uri="{FF2B5EF4-FFF2-40B4-BE49-F238E27FC236}">
-                <a16:creationId xmlns:a16="http://schemas.microsoft.com/office/drawing/2014/main" id="{BADCF599-63B3-BF6B-3598-BF7EC630439D}"/>
-              </a:ext>
-            </a:extLst>
-          </p:cNvPr>
-          <p:cNvSpPr/>
-          <p:nvPr/>
-        </p:nvSpPr>
-        <p:spPr>
-          <a:xfrm>
-            <a:off x="3678348" y="5065873"/>
-            <a:ext cx="4795974" cy="346332"/>
-          </a:xfrm>
-          <a:prstGeom prst="roundRect">
-            <a:avLst/>
-          </a:prstGeom>
-          <a:noFill/>
-        </p:spPr>
-        <p:style>
-          <a:lnRef idx="2">
-            <a:schemeClr val="accent1">
-              <a:shade val="15000"/>
-            </a:schemeClr>
-          </a:lnRef>
-          <a:fillRef idx="1">
-            <a:schemeClr val="accent1"/>
-          </a:fillRef>
-          <a:effectRef idx="0">
-            <a:schemeClr val="accent1"/>
-          </a:effectRef>
-          <a:fontRef idx="minor">
-            <a:schemeClr val="lt1"/>
-          </a:fontRef>
-        </p:style>
-        <p:txBody>
-          <a:bodyPr rtlCol="0" anchor="ctr"/>
-          <a:lstStyle/>
-          <a:p>
-            <a:pPr algn="ctr"/>
-            <a:endParaRPr lang="en-US" dirty="0"/>
-          </a:p>
-        </p:txBody>
-      </p:sp>
-      <p:sp>
-        <p:nvSpPr>
-          <p:cNvPr id="8" name="Rectangle: Rounded Corners 7">
-            <a:extLst>
-              <a:ext uri="{FF2B5EF4-FFF2-40B4-BE49-F238E27FC236}">
-                <a16:creationId xmlns:a16="http://schemas.microsoft.com/office/drawing/2014/main" id="{8B3C557B-FF12-1CD9-B572-93C7A973DB0D}"/>
-              </a:ext>
-            </a:extLst>
-          </p:cNvPr>
-          <p:cNvSpPr/>
-          <p:nvPr/>
-        </p:nvSpPr>
-        <p:spPr>
-          <a:xfrm>
-            <a:off x="3678348" y="5061494"/>
-            <a:ext cx="3818007" cy="346332"/>
-          </a:xfrm>
-          <a:prstGeom prst="roundRect">
-            <a:avLst/>
-          </a:prstGeom>
-          <a:solidFill>
-            <a:srgbClr val="33AAEE"/>
-          </a:solidFill>
-          <a:ln>
-            <a:noFill/>
-          </a:ln>
-        </p:spPr>
-        <p:style>
-          <a:lnRef idx="2">
-            <a:schemeClr val="accent1">
-              <a:shade val="15000"/>
-            </a:schemeClr>
-          </a:lnRef>
-          <a:fillRef idx="1">
-            <a:schemeClr val="accent1"/>
-          </a:fillRef>
-          <a:effectRef idx="0">
-            <a:schemeClr val="accent1"/>
-          </a:effectRef>
-          <a:fontRef idx="minor">
-            <a:schemeClr val="lt1"/>
-          </a:fontRef>
-        </p:style>
-        <p:txBody>
-          <a:bodyPr rtlCol="0" anchor="ctr"/>
-          <a:lstStyle/>
-          <a:p>
-            <a:pPr algn="ctr"/>
-            <a:endParaRPr lang="en-US"/>
-          </a:p>
-        </p:txBody>
-      </p:sp>
-      <p:sp>
-        <p:nvSpPr>
-          <p:cNvPr id="16" name="TextBox 15">
-            <a:extLst>
-              <a:ext uri="{FF2B5EF4-FFF2-40B4-BE49-F238E27FC236}">
-                <a16:creationId xmlns:a16="http://schemas.microsoft.com/office/drawing/2014/main" id="{C9F218D7-B754-E6DA-9A39-41A7CB1FDBAD}"/>
-              </a:ext>
-            </a:extLst>
-          </p:cNvPr>
-          <p:cNvSpPr txBox="1"/>
-          <p:nvPr/>
-        </p:nvSpPr>
-        <p:spPr>
-          <a:xfrm>
-            <a:off x="5551295" y="4759196"/>
-            <a:ext cx="1057405" cy="307777"/>
-          </a:xfrm>
-          <a:prstGeom prst="rect">
-            <a:avLst/>
-          </a:prstGeom>
-          <a:noFill/>
-        </p:spPr>
-        <p:txBody>
-          <a:bodyPr wrap="none" rtlCol="0">
-            <a:spAutoFit/>
-          </a:bodyPr>
-          <a:lstStyle/>
-          <a:p>
-            <a:r>
-              <a:rPr lang="en-US" sz="1400" dirty="0"/>
-              <a:t>Completed</a:t>
-            </a:r>
-          </a:p>
-        </p:txBody>
-      </p:sp>
-      <p:sp>
-        <p:nvSpPr>
-          <p:cNvPr id="6" name="Flowchart: Terminator 5">
-            <a:extLst>
-              <a:ext uri="{FF2B5EF4-FFF2-40B4-BE49-F238E27FC236}">
-                <a16:creationId xmlns:a16="http://schemas.microsoft.com/office/drawing/2014/main" id="{7834EFD9-8B62-312B-24B4-9CC41DC25D38}"/>
-              </a:ext>
-            </a:extLst>
-          </p:cNvPr>
-          <p:cNvSpPr/>
-          <p:nvPr/>
-        </p:nvSpPr>
-        <p:spPr>
-          <a:xfrm>
-            <a:off x="4039468" y="5856656"/>
-            <a:ext cx="1327450" cy="546260"/>
-          </a:xfrm>
-          <a:prstGeom prst="flowChartTerminator">
-            <a:avLst/>
-          </a:prstGeom>
-          <a:solidFill>
-            <a:srgbClr val="FF0000"/>
-          </a:solidFill>
-          <a:ln>
-            <a:noFill/>
-          </a:ln>
-          <a:effectLst>
-            <a:outerShdw blurRad="63500" sx="102000" sy="102000" algn="ctr" rotWithShape="0">
-              <a:prstClr val="black">
-                <a:alpha val="40000"/>
-              </a:prstClr>
-            </a:outerShdw>
-          </a:effectLst>
-        </p:spPr>
-        <p:style>
-          <a:lnRef idx="2">
-            <a:schemeClr val="accent1">
-              <a:shade val="15000"/>
-            </a:schemeClr>
-          </a:lnRef>
-          <a:fillRef idx="1">
-            <a:schemeClr val="accent1"/>
-          </a:fillRef>
-          <a:effectRef idx="0">
-            <a:schemeClr val="accent1"/>
-          </a:effectRef>
-          <a:fontRef idx="minor">
-            <a:schemeClr val="lt1"/>
-          </a:fontRef>
-        </p:style>
-        <p:txBody>
-          <a:bodyPr rtlCol="0" anchor="ctr"/>
-          <a:lstStyle/>
-          <a:p>
-            <a:pPr algn="ctr"/>
-            <a:r>
-              <a:rPr lang="en-US" sz="2400" dirty="0"/>
-              <a:t>Abort</a:t>
-            </a:r>
-            <a:endParaRPr lang="en-US" dirty="0"/>
-          </a:p>
-        </p:txBody>
-      </p:sp>
-      <p:pic>
-        <p:nvPicPr>
-          <p:cNvPr id="17" name="Picture 16">
-            <a:extLst>
-              <a:ext uri="{FF2B5EF4-FFF2-40B4-BE49-F238E27FC236}">
-                <a16:creationId xmlns:a16="http://schemas.microsoft.com/office/drawing/2014/main" id="{896BA1FF-F271-64E6-68D6-A07375F18B62}"/>
-              </a:ext>
-            </a:extLst>
-          </p:cNvPr>
-          <p:cNvPicPr>
-            <a:picLocks noChangeAspect="1"/>
-          </p:cNvPicPr>
-          <p:nvPr/>
-        </p:nvPicPr>
-        <p:blipFill>
-          <a:blip r:embed="rId4">
-            <a:extLst>
-              <a:ext uri="{28A0092B-C50C-407E-A947-70E740481C1C}">
-                <a14:useLocalDpi xmlns:a14="http://schemas.microsoft.com/office/drawing/2010/main" val="0"/>
-              </a:ext>
-            </a:extLst>
-          </a:blip>
-          <a:srcRect l="575" t="21456" r="6284" b="447"/>
-          <a:stretch/>
-        </p:blipFill>
-        <p:spPr>
-          <a:xfrm>
-            <a:off x="4039468" y="1491716"/>
-            <a:ext cx="3957220" cy="2987416"/>
-          </a:xfrm>
-          <a:prstGeom prst="rect">
-            <a:avLst/>
-          </a:prstGeom>
-          <a:ln>
-            <a:solidFill>
+            </a:ln>
+          </p:spPr>
+          <p:style>
+            <a:lnRef idx="2">
+              <a:schemeClr val="accent1">
+                <a:shade val="15000"/>
+              </a:schemeClr>
+            </a:lnRef>
+            <a:fillRef idx="1">
+              <a:schemeClr val="accent1"/>
+            </a:fillRef>
+            <a:effectRef idx="0">
+              <a:schemeClr val="accent1"/>
+            </a:effectRef>
+            <a:fontRef idx="minor">
+              <a:schemeClr val="lt1"/>
+            </a:fontRef>
+          </p:style>
+          <p:txBody>
+            <a:bodyPr rtlCol="0" anchor="ctr"/>
+            <a:lstStyle/>
+            <a:p>
+              <a:pPr algn="ctr"/>
+              <a:endParaRPr lang="en-US"/>
+            </a:p>
+          </p:txBody>
+        </p:sp>
+        <p:pic>
+          <p:nvPicPr>
+            <p:cNvPr id="23" name="Picture 22">
+              <a:extLst>
+                <a:ext uri="{FF2B5EF4-FFF2-40B4-BE49-F238E27FC236}">
+                  <a16:creationId xmlns:a16="http://schemas.microsoft.com/office/drawing/2014/main" id="{8361E361-0E6C-37E7-B2B8-5EA6CA751E99}"/>
+                </a:ext>
+              </a:extLst>
+            </p:cNvPr>
+            <p:cNvPicPr>
+              <a:picLocks noChangeAspect="1"/>
+            </p:cNvPicPr>
+            <p:nvPr/>
+          </p:nvPicPr>
+          <p:blipFill>
+            <a:blip r:embed="rId5"/>
+            <a:stretch>
+              <a:fillRect/>
+            </a:stretch>
+          </p:blipFill>
+          <p:spPr>
+            <a:xfrm>
+              <a:off x="4079202" y="2074887"/>
+              <a:ext cx="261668" cy="1626079"/>
+            </a:xfrm>
+            <a:prstGeom prst="rect">
+              <a:avLst/>
+            </a:prstGeom>
+          </p:spPr>
+        </p:pic>
+        <p:cxnSp>
+          <p:nvCxnSpPr>
+            <p:cNvPr id="27" name="Straight Connector 26">
+              <a:extLst>
+                <a:ext uri="{FF2B5EF4-FFF2-40B4-BE49-F238E27FC236}">
+                  <a16:creationId xmlns:a16="http://schemas.microsoft.com/office/drawing/2014/main" id="{4CED889C-5D23-2D61-E3A7-E444720AB004}"/>
+                </a:ext>
+              </a:extLst>
+            </p:cNvPr>
+            <p:cNvCxnSpPr/>
+            <p:nvPr/>
+          </p:nvCxnSpPr>
+          <p:spPr>
+            <a:xfrm flipH="1">
+              <a:off x="6359097" y="4479132"/>
+              <a:ext cx="895718" cy="0"/>
+            </a:xfrm>
+            <a:prstGeom prst="line">
+              <a:avLst/>
+            </a:prstGeom>
+            <a:ln w="12700"/>
+          </p:spPr>
+          <p:style>
+            <a:lnRef idx="2">
+              <a:schemeClr val="dk1"/>
+            </a:lnRef>
+            <a:fillRef idx="0">
+              <a:schemeClr val="dk1"/>
+            </a:fillRef>
+            <a:effectRef idx="1">
+              <a:schemeClr val="dk1"/>
+            </a:effectRef>
+            <a:fontRef idx="minor">
               <a:schemeClr val="tx1"/>
-            </a:solidFill>
-          </a:ln>
-        </p:spPr>
-      </p:pic>
-      <p:sp>
-        <p:nvSpPr>
-          <p:cNvPr id="13" name="Rectangle 12">
-            <a:extLst>
-              <a:ext uri="{FF2B5EF4-FFF2-40B4-BE49-F238E27FC236}">
-                <a16:creationId xmlns:a16="http://schemas.microsoft.com/office/drawing/2014/main" id="{2565031A-1428-14DC-3301-DAAEC6E27F92}"/>
-              </a:ext>
-            </a:extLst>
-          </p:cNvPr>
-          <p:cNvSpPr/>
-          <p:nvPr/>
-        </p:nvSpPr>
-        <p:spPr>
-          <a:xfrm>
-            <a:off x="6600074" y="1594980"/>
-            <a:ext cx="1196282" cy="640483"/>
-          </a:xfrm>
-          <a:prstGeom prst="rect">
-            <a:avLst/>
-          </a:prstGeom>
-          <a:solidFill>
-            <a:schemeClr val="bg1"/>
-          </a:solidFill>
-          <a:ln>
-            <a:solidFill>
-              <a:schemeClr val="bg1">
-                <a:lumMod val="75000"/>
-              </a:schemeClr>
-            </a:solidFill>
-          </a:ln>
-        </p:spPr>
-        <p:style>
-          <a:lnRef idx="2">
-            <a:schemeClr val="accent1">
-              <a:shade val="15000"/>
-            </a:schemeClr>
-          </a:lnRef>
-          <a:fillRef idx="1">
-            <a:schemeClr val="accent1"/>
-          </a:fillRef>
-          <a:effectRef idx="0">
-            <a:schemeClr val="accent1"/>
-          </a:effectRef>
-          <a:fontRef idx="minor">
-            <a:schemeClr val="lt1"/>
-          </a:fontRef>
-        </p:style>
-        <p:txBody>
-          <a:bodyPr rtlCol="0" anchor="ctr"/>
-          <a:lstStyle/>
-          <a:p>
-            <a:r>
-              <a:rPr lang="en-US" sz="900" b="1" dirty="0">
-                <a:solidFill>
-                  <a:srgbClr val="0070C0"/>
-                </a:solidFill>
-              </a:rPr>
-              <a:t>O          </a:t>
-            </a:r>
-            <a:r>
-              <a:rPr lang="en-US" sz="900" b="1" dirty="0">
-                <a:solidFill>
-                  <a:schemeClr val="tx1"/>
-                </a:solidFill>
-              </a:rPr>
-              <a:t>DPOAE</a:t>
-            </a:r>
-            <a:endParaRPr lang="en-US" sz="900" b="1" dirty="0">
-              <a:solidFill>
-                <a:srgbClr val="0070C0"/>
-              </a:solidFill>
-            </a:endParaRPr>
-          </a:p>
-          <a:p>
-            <a:endParaRPr lang="en-US" sz="900" dirty="0">
-              <a:solidFill>
-                <a:srgbClr val="0070C0"/>
-              </a:solidFill>
-            </a:endParaRPr>
-          </a:p>
-          <a:p>
-            <a:r>
-              <a:rPr lang="en-US" sz="900" b="1" dirty="0">
-                <a:solidFill>
-                  <a:srgbClr val="C00000"/>
-                </a:solidFill>
-              </a:rPr>
-              <a:t>X          </a:t>
-            </a:r>
-            <a:r>
-              <a:rPr lang="en-US" sz="900" b="1" dirty="0">
-                <a:solidFill>
-                  <a:schemeClr val="tx1"/>
-                </a:solidFill>
-              </a:rPr>
-              <a:t>NOISE</a:t>
-            </a:r>
-            <a:endParaRPr lang="en-US" sz="900" b="1" dirty="0">
-              <a:solidFill>
-                <a:srgbClr val="C00000"/>
-              </a:solidFill>
-            </a:endParaRPr>
-          </a:p>
-        </p:txBody>
-      </p:sp>
-      <p:sp>
-        <p:nvSpPr>
-          <p:cNvPr id="15" name="Rectangle 14">
-            <a:extLst>
-              <a:ext uri="{FF2B5EF4-FFF2-40B4-BE49-F238E27FC236}">
-                <a16:creationId xmlns:a16="http://schemas.microsoft.com/office/drawing/2014/main" id="{BC400713-2B34-C58C-7C3C-66C1693E2DA5}"/>
-              </a:ext>
-            </a:extLst>
-          </p:cNvPr>
-          <p:cNvSpPr/>
-          <p:nvPr/>
-        </p:nvSpPr>
-        <p:spPr>
-          <a:xfrm>
-            <a:off x="4095278" y="3252159"/>
-            <a:ext cx="189782" cy="854015"/>
-          </a:xfrm>
-          <a:prstGeom prst="rect">
-            <a:avLst/>
-          </a:prstGeom>
-          <a:solidFill>
-            <a:schemeClr val="bg1"/>
-          </a:solidFill>
-          <a:ln>
+            </a:fontRef>
+          </p:style>
+        </p:cxnSp>
+        <p:sp>
+          <p:nvSpPr>
+            <p:cNvPr id="29" name="Rectangle 28">
+              <a:extLst>
+                <a:ext uri="{FF2B5EF4-FFF2-40B4-BE49-F238E27FC236}">
+                  <a16:creationId xmlns:a16="http://schemas.microsoft.com/office/drawing/2014/main" id="{74590467-BED6-E84D-8D50-960D991E4977}"/>
+                </a:ext>
+              </a:extLst>
+            </p:cNvPr>
+            <p:cNvSpPr/>
+            <p:nvPr/>
+          </p:nvSpPr>
+          <p:spPr>
+            <a:xfrm>
+              <a:off x="4364968" y="4123426"/>
+              <a:ext cx="3588590" cy="141512"/>
+            </a:xfrm>
+            <a:prstGeom prst="rect">
+              <a:avLst/>
+            </a:prstGeom>
             <a:solidFill>
               <a:schemeClr val="bg1"/>
             </a:solidFill>
-          </a:ln>
-        </p:spPr>
-        <p:style>
-          <a:lnRef idx="2">
-            <a:schemeClr val="accent1">
-              <a:shade val="15000"/>
-            </a:schemeClr>
-          </a:lnRef>
-          <a:fillRef idx="1">
-            <a:schemeClr val="accent1"/>
-          </a:fillRef>
-          <a:effectRef idx="0">
-            <a:schemeClr val="accent1"/>
-          </a:effectRef>
-          <a:fontRef idx="minor">
-            <a:schemeClr val="lt1"/>
-          </a:fontRef>
-        </p:style>
-        <p:txBody>
-          <a:bodyPr rtlCol="0" anchor="ctr"/>
-          <a:lstStyle/>
-          <a:p>
-            <a:pPr algn="ctr"/>
-            <a:endParaRPr lang="en-US"/>
-          </a:p>
-        </p:txBody>
-      </p:sp>
-      <p:sp>
-        <p:nvSpPr>
-          <p:cNvPr id="24" name="Rectangle 23">
-            <a:extLst>
-              <a:ext uri="{FF2B5EF4-FFF2-40B4-BE49-F238E27FC236}">
-                <a16:creationId xmlns:a16="http://schemas.microsoft.com/office/drawing/2014/main" id="{B156EBAE-98EF-52EB-2209-ED36847F6E12}"/>
-              </a:ext>
-            </a:extLst>
-          </p:cNvPr>
-          <p:cNvSpPr/>
-          <p:nvPr/>
-        </p:nvSpPr>
-        <p:spPr>
-          <a:xfrm>
-            <a:off x="4073972" y="1777042"/>
-            <a:ext cx="245592" cy="1470738"/>
-          </a:xfrm>
-          <a:prstGeom prst="rect">
-            <a:avLst/>
-          </a:prstGeom>
-          <a:solidFill>
-            <a:schemeClr val="bg1"/>
-          </a:solidFill>
-          <a:ln>
-            <a:solidFill>
-              <a:schemeClr val="bg1"/>
-            </a:solidFill>
-          </a:ln>
-        </p:spPr>
-        <p:style>
-          <a:lnRef idx="2">
-            <a:schemeClr val="accent1">
-              <a:shade val="15000"/>
-            </a:schemeClr>
-          </a:lnRef>
-          <a:fillRef idx="1">
-            <a:schemeClr val="accent1"/>
-          </a:fillRef>
-          <a:effectRef idx="0">
-            <a:schemeClr val="accent1"/>
-          </a:effectRef>
-          <a:fontRef idx="minor">
-            <a:schemeClr val="lt1"/>
-          </a:fontRef>
-        </p:style>
-        <p:txBody>
-          <a:bodyPr rtlCol="0" anchor="ctr"/>
-          <a:lstStyle/>
-          <a:p>
-            <a:pPr algn="ctr"/>
-            <a:endParaRPr lang="en-US"/>
-          </a:p>
-        </p:txBody>
-      </p:sp>
-      <p:pic>
-        <p:nvPicPr>
-          <p:cNvPr id="23" name="Picture 22">
-            <a:extLst>
-              <a:ext uri="{FF2B5EF4-FFF2-40B4-BE49-F238E27FC236}">
-                <a16:creationId xmlns:a16="http://schemas.microsoft.com/office/drawing/2014/main" id="{8361E361-0E6C-37E7-B2B8-5EA6CA751E99}"/>
-              </a:ext>
-            </a:extLst>
-          </p:cNvPr>
-          <p:cNvPicPr>
-            <a:picLocks noChangeAspect="1"/>
-          </p:cNvPicPr>
-          <p:nvPr/>
-        </p:nvPicPr>
-        <p:blipFill>
-          <a:blip r:embed="rId5"/>
-          <a:stretch>
-            <a:fillRect/>
-          </a:stretch>
-        </p:blipFill>
-        <p:spPr>
-          <a:xfrm>
-            <a:off x="4079202" y="2074887"/>
-            <a:ext cx="261668" cy="1626079"/>
-          </a:xfrm>
-          <a:prstGeom prst="rect">
-            <a:avLst/>
-          </a:prstGeom>
-        </p:spPr>
-      </p:pic>
-      <p:cxnSp>
-        <p:nvCxnSpPr>
-          <p:cNvPr id="27" name="Straight Connector 26">
-            <a:extLst>
-              <a:ext uri="{FF2B5EF4-FFF2-40B4-BE49-F238E27FC236}">
-                <a16:creationId xmlns:a16="http://schemas.microsoft.com/office/drawing/2014/main" id="{4CED889C-5D23-2D61-E3A7-E444720AB004}"/>
-              </a:ext>
-            </a:extLst>
-          </p:cNvPr>
-          <p:cNvCxnSpPr/>
-          <p:nvPr/>
-        </p:nvCxnSpPr>
-        <p:spPr>
-          <a:xfrm flipH="1">
-            <a:off x="6359097" y="4479132"/>
-            <a:ext cx="895718" cy="0"/>
-          </a:xfrm>
-          <a:prstGeom prst="line">
-            <a:avLst/>
-          </a:prstGeom>
-          <a:ln w="12700"/>
-        </p:spPr>
-        <p:style>
-          <a:lnRef idx="2">
-            <a:schemeClr val="dk1"/>
-          </a:lnRef>
-          <a:fillRef idx="0">
-            <a:schemeClr val="dk1"/>
-          </a:fillRef>
-          <a:effectRef idx="1">
-            <a:schemeClr val="dk1"/>
-          </a:effectRef>
-          <a:fontRef idx="minor">
-            <a:schemeClr val="tx1"/>
-          </a:fontRef>
-        </p:style>
-      </p:cxnSp>
-      <p:sp>
-        <p:nvSpPr>
-          <p:cNvPr id="29" name="Rectangle 28">
-            <a:extLst>
-              <a:ext uri="{FF2B5EF4-FFF2-40B4-BE49-F238E27FC236}">
-                <a16:creationId xmlns:a16="http://schemas.microsoft.com/office/drawing/2014/main" id="{74590467-BED6-E84D-8D50-960D991E4977}"/>
-              </a:ext>
-            </a:extLst>
-          </p:cNvPr>
-          <p:cNvSpPr/>
-          <p:nvPr/>
-        </p:nvSpPr>
-        <p:spPr>
-          <a:xfrm>
-            <a:off x="4364968" y="4123426"/>
-            <a:ext cx="3588590" cy="141512"/>
-          </a:xfrm>
-          <a:prstGeom prst="rect">
-            <a:avLst/>
-          </a:prstGeom>
-          <a:solidFill>
-            <a:schemeClr val="bg1"/>
-          </a:solidFill>
-          <a:ln>
-            <a:solidFill>
-              <a:schemeClr val="bg1"/>
-            </a:solidFill>
-          </a:ln>
-        </p:spPr>
-        <p:style>
-          <a:lnRef idx="2">
-            <a:schemeClr val="accent1">
-              <a:shade val="15000"/>
-            </a:schemeClr>
-          </a:lnRef>
-          <a:fillRef idx="1">
-            <a:schemeClr val="accent1"/>
-          </a:fillRef>
-          <a:effectRef idx="0">
-            <a:schemeClr val="accent1"/>
-          </a:effectRef>
-          <a:fontRef idx="minor">
-            <a:schemeClr val="lt1"/>
-          </a:fontRef>
-        </p:style>
-        <p:txBody>
-          <a:bodyPr rtlCol="0" anchor="ctr"/>
-          <a:lstStyle/>
-          <a:p>
-            <a:pPr algn="ctr"/>
-            <a:endParaRPr lang="en-US"/>
-          </a:p>
-        </p:txBody>
-      </p:sp>
-      <p:sp>
-        <p:nvSpPr>
-          <p:cNvPr id="28" name="TextBox 27">
-            <a:extLst>
-              <a:ext uri="{FF2B5EF4-FFF2-40B4-BE49-F238E27FC236}">
-                <a16:creationId xmlns:a16="http://schemas.microsoft.com/office/drawing/2014/main" id="{F7F157F4-28D8-2958-B2F2-49C6F4D5E7B8}"/>
-              </a:ext>
-            </a:extLst>
-          </p:cNvPr>
-          <p:cNvSpPr txBox="1"/>
-          <p:nvPr/>
-        </p:nvSpPr>
-        <p:spPr>
-          <a:xfrm>
-            <a:off x="4365599" y="4086718"/>
-            <a:ext cx="489922" cy="261610"/>
-          </a:xfrm>
-          <a:prstGeom prst="rect">
-            <a:avLst/>
-          </a:prstGeom>
-          <a:noFill/>
-        </p:spPr>
-        <p:txBody>
-          <a:bodyPr wrap="square" rtlCol="0">
-            <a:spAutoFit/>
-          </a:bodyPr>
-          <a:lstStyle/>
-          <a:p>
-            <a:r>
-              <a:rPr lang="en-US" sz="1100" dirty="0">
+            <a:ln>
+              <a:solidFill>
+                <a:schemeClr val="bg1"/>
+              </a:solidFill>
+            </a:ln>
+          </p:spPr>
+          <p:style>
+            <a:lnRef idx="2">
+              <a:schemeClr val="accent1">
+                <a:shade val="15000"/>
+              </a:schemeClr>
+            </a:lnRef>
+            <a:fillRef idx="1">
+              <a:schemeClr val="accent1"/>
+            </a:fillRef>
+            <a:effectRef idx="0">
+              <a:schemeClr val="accent1"/>
+            </a:effectRef>
+            <a:fontRef idx="minor">
+              <a:schemeClr val="lt1"/>
+            </a:fontRef>
+          </p:style>
+          <p:txBody>
+            <a:bodyPr rtlCol="0" anchor="ctr"/>
+            <a:lstStyle/>
+            <a:p>
+              <a:pPr algn="ctr"/>
+              <a:endParaRPr lang="en-US"/>
+            </a:p>
+          </p:txBody>
+        </p:sp>
+        <p:sp>
+          <p:nvSpPr>
+            <p:cNvPr id="28" name="TextBox 27">
+              <a:extLst>
+                <a:ext uri="{FF2B5EF4-FFF2-40B4-BE49-F238E27FC236}">
+                  <a16:creationId xmlns:a16="http://schemas.microsoft.com/office/drawing/2014/main" id="{F7F157F4-28D8-2958-B2F2-49C6F4D5E7B8}"/>
+                </a:ext>
+              </a:extLst>
+            </p:cNvPr>
+            <p:cNvSpPr txBox="1"/>
+            <p:nvPr/>
+          </p:nvSpPr>
+          <p:spPr>
+            <a:xfrm>
+              <a:off x="4365599" y="4086718"/>
+              <a:ext cx="489922" cy="261610"/>
+            </a:xfrm>
+            <a:prstGeom prst="rect">
+              <a:avLst/>
+            </a:prstGeom>
+            <a:noFill/>
+          </p:spPr>
+          <p:txBody>
+            <a:bodyPr wrap="square" rtlCol="0">
+              <a:spAutoFit/>
+            </a:bodyPr>
+            <a:lstStyle/>
+            <a:p>
+              <a:r>
+                <a:rPr lang="en-US" sz="1100" dirty="0">
+                  <a:latin typeface="+mj-lt"/>
+                </a:rPr>
+                <a:t>500</a:t>
+              </a:r>
+              <a:endParaRPr lang="en-US" sz="1050" dirty="0">
                 <a:latin typeface="+mj-lt"/>
-              </a:rPr>
-              <a:t>500</a:t>
-            </a:r>
-            <a:endParaRPr lang="en-US" sz="1050" dirty="0">
-              <a:latin typeface="+mj-lt"/>
-            </a:endParaRPr>
-          </a:p>
-        </p:txBody>
-      </p:sp>
-      <p:sp>
-        <p:nvSpPr>
-          <p:cNvPr id="30" name="TextBox 29">
-            <a:extLst>
-              <a:ext uri="{FF2B5EF4-FFF2-40B4-BE49-F238E27FC236}">
-                <a16:creationId xmlns:a16="http://schemas.microsoft.com/office/drawing/2014/main" id="{E009F830-5BEE-5093-48C6-73D6C67ECF9F}"/>
-              </a:ext>
-            </a:extLst>
-          </p:cNvPr>
-          <p:cNvSpPr txBox="1"/>
-          <p:nvPr/>
-        </p:nvSpPr>
-        <p:spPr>
-          <a:xfrm>
-            <a:off x="5063783" y="4061128"/>
-            <a:ext cx="348519" cy="261610"/>
-          </a:xfrm>
-          <a:prstGeom prst="rect">
-            <a:avLst/>
-          </a:prstGeom>
-          <a:noFill/>
-        </p:spPr>
-        <p:txBody>
-          <a:bodyPr wrap="square" rtlCol="0">
-            <a:spAutoFit/>
-          </a:bodyPr>
-          <a:lstStyle/>
-          <a:p>
-            <a:r>
-              <a:rPr lang="en-US" sz="1100" dirty="0">
+              </a:endParaRPr>
+            </a:p>
+          </p:txBody>
+        </p:sp>
+        <p:sp>
+          <p:nvSpPr>
+            <p:cNvPr id="30" name="TextBox 29">
+              <a:extLst>
+                <a:ext uri="{FF2B5EF4-FFF2-40B4-BE49-F238E27FC236}">
+                  <a16:creationId xmlns:a16="http://schemas.microsoft.com/office/drawing/2014/main" id="{E009F830-5BEE-5093-48C6-73D6C67ECF9F}"/>
+                </a:ext>
+              </a:extLst>
+            </p:cNvPr>
+            <p:cNvSpPr txBox="1"/>
+            <p:nvPr/>
+          </p:nvSpPr>
+          <p:spPr>
+            <a:xfrm>
+              <a:off x="5063783" y="4061128"/>
+              <a:ext cx="348519" cy="261610"/>
+            </a:xfrm>
+            <a:prstGeom prst="rect">
+              <a:avLst/>
+            </a:prstGeom>
+            <a:noFill/>
+          </p:spPr>
+          <p:txBody>
+            <a:bodyPr wrap="square" rtlCol="0">
+              <a:spAutoFit/>
+            </a:bodyPr>
+            <a:lstStyle/>
+            <a:p>
+              <a:r>
+                <a:rPr lang="en-US" sz="1100" dirty="0">
+                  <a:latin typeface="+mj-lt"/>
+                </a:rPr>
+                <a:t>1k</a:t>
+              </a:r>
+              <a:endParaRPr lang="en-US" sz="1050" dirty="0">
                 <a:latin typeface="+mj-lt"/>
-              </a:rPr>
-              <a:t>1k</a:t>
-            </a:r>
-            <a:endParaRPr lang="en-US" sz="1050" dirty="0">
-              <a:latin typeface="+mj-lt"/>
-            </a:endParaRPr>
-          </a:p>
-        </p:txBody>
-      </p:sp>
-      <p:sp>
-        <p:nvSpPr>
-          <p:cNvPr id="31" name="TextBox 30">
-            <a:extLst>
-              <a:ext uri="{FF2B5EF4-FFF2-40B4-BE49-F238E27FC236}">
-                <a16:creationId xmlns:a16="http://schemas.microsoft.com/office/drawing/2014/main" id="{1E02A35B-CDC0-081F-4389-A6AB755922B3}"/>
-              </a:ext>
-            </a:extLst>
-          </p:cNvPr>
-          <p:cNvSpPr txBox="1"/>
-          <p:nvPr/>
-        </p:nvSpPr>
-        <p:spPr>
-          <a:xfrm>
-            <a:off x="5719581" y="4060249"/>
-            <a:ext cx="382006" cy="261610"/>
-          </a:xfrm>
-          <a:prstGeom prst="rect">
-            <a:avLst/>
-          </a:prstGeom>
-          <a:noFill/>
-        </p:spPr>
-        <p:txBody>
-          <a:bodyPr wrap="square" rtlCol="0">
-            <a:spAutoFit/>
-          </a:bodyPr>
-          <a:lstStyle/>
-          <a:p>
-            <a:r>
-              <a:rPr lang="en-US" sz="1100" dirty="0">
+              </a:endParaRPr>
+            </a:p>
+          </p:txBody>
+        </p:sp>
+        <p:sp>
+          <p:nvSpPr>
+            <p:cNvPr id="31" name="TextBox 30">
+              <a:extLst>
+                <a:ext uri="{FF2B5EF4-FFF2-40B4-BE49-F238E27FC236}">
+                  <a16:creationId xmlns:a16="http://schemas.microsoft.com/office/drawing/2014/main" id="{1E02A35B-CDC0-081F-4389-A6AB755922B3}"/>
+                </a:ext>
+              </a:extLst>
+            </p:cNvPr>
+            <p:cNvSpPr txBox="1"/>
+            <p:nvPr/>
+          </p:nvSpPr>
+          <p:spPr>
+            <a:xfrm>
+              <a:off x="5719581" y="4060249"/>
+              <a:ext cx="382006" cy="261610"/>
+            </a:xfrm>
+            <a:prstGeom prst="rect">
+              <a:avLst/>
+            </a:prstGeom>
+            <a:noFill/>
+          </p:spPr>
+          <p:txBody>
+            <a:bodyPr wrap="square" rtlCol="0">
+              <a:spAutoFit/>
+            </a:bodyPr>
+            <a:lstStyle/>
+            <a:p>
+              <a:r>
+                <a:rPr lang="en-US" sz="1100" dirty="0">
+                  <a:latin typeface="+mj-lt"/>
+                </a:rPr>
+                <a:t>2k</a:t>
+              </a:r>
+              <a:endParaRPr lang="en-US" sz="1050" dirty="0">
                 <a:latin typeface="+mj-lt"/>
-              </a:rPr>
-              <a:t>2k</a:t>
-            </a:r>
-            <a:endParaRPr lang="en-US" sz="1050" dirty="0">
-              <a:latin typeface="+mj-lt"/>
-            </a:endParaRPr>
-          </a:p>
-        </p:txBody>
-      </p:sp>
-      <p:sp>
-        <p:nvSpPr>
-          <p:cNvPr id="32" name="TextBox 31">
-            <a:extLst>
-              <a:ext uri="{FF2B5EF4-FFF2-40B4-BE49-F238E27FC236}">
-                <a16:creationId xmlns:a16="http://schemas.microsoft.com/office/drawing/2014/main" id="{F5068E25-AC7A-8F6B-3150-3FDA506ED7A1}"/>
-              </a:ext>
-            </a:extLst>
-          </p:cNvPr>
-          <p:cNvSpPr txBox="1"/>
-          <p:nvPr/>
-        </p:nvSpPr>
-        <p:spPr>
-          <a:xfrm>
-            <a:off x="6388315" y="4053135"/>
-            <a:ext cx="332693" cy="261610"/>
-          </a:xfrm>
-          <a:prstGeom prst="rect">
-            <a:avLst/>
-          </a:prstGeom>
-          <a:noFill/>
-        </p:spPr>
-        <p:txBody>
-          <a:bodyPr wrap="square" rtlCol="0">
-            <a:spAutoFit/>
-          </a:bodyPr>
-          <a:lstStyle/>
-          <a:p>
-            <a:r>
-              <a:rPr lang="en-US" sz="1100" dirty="0">
+              </a:endParaRPr>
+            </a:p>
+          </p:txBody>
+        </p:sp>
+        <p:sp>
+          <p:nvSpPr>
+            <p:cNvPr id="32" name="TextBox 31">
+              <a:extLst>
+                <a:ext uri="{FF2B5EF4-FFF2-40B4-BE49-F238E27FC236}">
+                  <a16:creationId xmlns:a16="http://schemas.microsoft.com/office/drawing/2014/main" id="{F5068E25-AC7A-8F6B-3150-3FDA506ED7A1}"/>
+                </a:ext>
+              </a:extLst>
+            </p:cNvPr>
+            <p:cNvSpPr txBox="1"/>
+            <p:nvPr/>
+          </p:nvSpPr>
+          <p:spPr>
+            <a:xfrm>
+              <a:off x="6388315" y="4053135"/>
+              <a:ext cx="332693" cy="261610"/>
+            </a:xfrm>
+            <a:prstGeom prst="rect">
+              <a:avLst/>
+            </a:prstGeom>
+            <a:noFill/>
+          </p:spPr>
+          <p:txBody>
+            <a:bodyPr wrap="square" rtlCol="0">
+              <a:spAutoFit/>
+            </a:bodyPr>
+            <a:lstStyle/>
+            <a:p>
+              <a:r>
+                <a:rPr lang="en-US" sz="1100" dirty="0">
+                  <a:latin typeface="+mj-lt"/>
+                </a:rPr>
+                <a:t>4k</a:t>
+              </a:r>
+              <a:endParaRPr lang="en-US" sz="1050" dirty="0">
                 <a:latin typeface="+mj-lt"/>
-              </a:rPr>
-              <a:t>4k</a:t>
-            </a:r>
-            <a:endParaRPr lang="en-US" sz="1050" dirty="0">
-              <a:latin typeface="+mj-lt"/>
-            </a:endParaRPr>
-          </a:p>
-        </p:txBody>
-      </p:sp>
-      <p:sp>
-        <p:nvSpPr>
-          <p:cNvPr id="33" name="TextBox 32">
-            <a:extLst>
-              <a:ext uri="{FF2B5EF4-FFF2-40B4-BE49-F238E27FC236}">
-                <a16:creationId xmlns:a16="http://schemas.microsoft.com/office/drawing/2014/main" id="{8F5F8CDF-964A-629D-43BC-CAE9AF3B0564}"/>
-              </a:ext>
-            </a:extLst>
-          </p:cNvPr>
-          <p:cNvSpPr txBox="1"/>
-          <p:nvPr/>
-        </p:nvSpPr>
-        <p:spPr>
-          <a:xfrm>
-            <a:off x="7048672" y="4041732"/>
-            <a:ext cx="332693" cy="261610"/>
-          </a:xfrm>
-          <a:prstGeom prst="rect">
-            <a:avLst/>
-          </a:prstGeom>
-          <a:noFill/>
-        </p:spPr>
-        <p:txBody>
-          <a:bodyPr wrap="square" rtlCol="0">
-            <a:spAutoFit/>
-          </a:bodyPr>
-          <a:lstStyle/>
-          <a:p>
-            <a:r>
-              <a:rPr lang="en-US" sz="1100" dirty="0">
+              </a:endParaRPr>
+            </a:p>
+          </p:txBody>
+        </p:sp>
+        <p:sp>
+          <p:nvSpPr>
+            <p:cNvPr id="33" name="TextBox 32">
+              <a:extLst>
+                <a:ext uri="{FF2B5EF4-FFF2-40B4-BE49-F238E27FC236}">
+                  <a16:creationId xmlns:a16="http://schemas.microsoft.com/office/drawing/2014/main" id="{8F5F8CDF-964A-629D-43BC-CAE9AF3B0564}"/>
+                </a:ext>
+              </a:extLst>
+            </p:cNvPr>
+            <p:cNvSpPr txBox="1"/>
+            <p:nvPr/>
+          </p:nvSpPr>
+          <p:spPr>
+            <a:xfrm>
+              <a:off x="7048672" y="4041732"/>
+              <a:ext cx="332693" cy="261610"/>
+            </a:xfrm>
+            <a:prstGeom prst="rect">
+              <a:avLst/>
+            </a:prstGeom>
+            <a:noFill/>
+          </p:spPr>
+          <p:txBody>
+            <a:bodyPr wrap="square" rtlCol="0">
+              <a:spAutoFit/>
+            </a:bodyPr>
+            <a:lstStyle/>
+            <a:p>
+              <a:r>
+                <a:rPr lang="en-US" sz="1100" dirty="0">
+                  <a:latin typeface="+mj-lt"/>
+                </a:rPr>
+                <a:t>8k</a:t>
+              </a:r>
+              <a:endParaRPr lang="en-US" sz="1050" dirty="0">
                 <a:latin typeface="+mj-lt"/>
-              </a:rPr>
-              <a:t>8k</a:t>
-            </a:r>
-            <a:endParaRPr lang="en-US" sz="1050" dirty="0">
-              <a:latin typeface="+mj-lt"/>
-            </a:endParaRPr>
-          </a:p>
-        </p:txBody>
-      </p:sp>
-      <p:sp>
-        <p:nvSpPr>
-          <p:cNvPr id="34" name="TextBox 33">
-            <a:extLst>
-              <a:ext uri="{FF2B5EF4-FFF2-40B4-BE49-F238E27FC236}">
-                <a16:creationId xmlns:a16="http://schemas.microsoft.com/office/drawing/2014/main" id="{A77E979E-FE15-9C62-9A29-D7FC14187514}"/>
-              </a:ext>
-            </a:extLst>
-          </p:cNvPr>
-          <p:cNvSpPr txBox="1"/>
-          <p:nvPr/>
-        </p:nvSpPr>
-        <p:spPr>
-          <a:xfrm>
-            <a:off x="7629461" y="4041732"/>
-            <a:ext cx="433971" cy="261610"/>
-          </a:xfrm>
-          <a:prstGeom prst="rect">
-            <a:avLst/>
-          </a:prstGeom>
-          <a:noFill/>
-        </p:spPr>
-        <p:txBody>
-          <a:bodyPr wrap="square" rtlCol="0">
-            <a:spAutoFit/>
-          </a:bodyPr>
-          <a:lstStyle/>
-          <a:p>
-            <a:r>
-              <a:rPr lang="en-US" sz="1100" dirty="0">
+              </a:endParaRPr>
+            </a:p>
+          </p:txBody>
+        </p:sp>
+        <p:sp>
+          <p:nvSpPr>
+            <p:cNvPr id="34" name="TextBox 33">
+              <a:extLst>
+                <a:ext uri="{FF2B5EF4-FFF2-40B4-BE49-F238E27FC236}">
+                  <a16:creationId xmlns:a16="http://schemas.microsoft.com/office/drawing/2014/main" id="{A77E979E-FE15-9C62-9A29-D7FC14187514}"/>
+                </a:ext>
+              </a:extLst>
+            </p:cNvPr>
+            <p:cNvSpPr txBox="1"/>
+            <p:nvPr/>
+          </p:nvSpPr>
+          <p:spPr>
+            <a:xfrm>
+              <a:off x="7629461" y="4041732"/>
+              <a:ext cx="433971" cy="261610"/>
+            </a:xfrm>
+            <a:prstGeom prst="rect">
+              <a:avLst/>
+            </a:prstGeom>
+            <a:noFill/>
+          </p:spPr>
+          <p:txBody>
+            <a:bodyPr wrap="square" rtlCol="0">
+              <a:spAutoFit/>
+            </a:bodyPr>
+            <a:lstStyle/>
+            <a:p>
+              <a:r>
+                <a:rPr lang="en-US" sz="1100" dirty="0">
+                  <a:latin typeface="+mj-lt"/>
+                </a:rPr>
+                <a:t>16k</a:t>
+              </a:r>
+              <a:endParaRPr lang="en-US" sz="1050" dirty="0">
                 <a:latin typeface="+mj-lt"/>
-              </a:rPr>
-              <a:t>16k</a:t>
-            </a:r>
-            <a:endParaRPr lang="en-US" sz="1050" dirty="0">
-              <a:latin typeface="+mj-lt"/>
-            </a:endParaRPr>
-          </a:p>
-        </p:txBody>
-      </p:sp>
-      <p:sp>
-        <p:nvSpPr>
-          <p:cNvPr id="18" name="Rectangle 17">
-            <a:extLst>
-              <a:ext uri="{FF2B5EF4-FFF2-40B4-BE49-F238E27FC236}">
-                <a16:creationId xmlns:a16="http://schemas.microsoft.com/office/drawing/2014/main" id="{03BAA99D-84EE-93A7-E5D0-14982EBDDE56}"/>
-              </a:ext>
-            </a:extLst>
-          </p:cNvPr>
-          <p:cNvSpPr/>
-          <p:nvPr/>
-        </p:nvSpPr>
-        <p:spPr>
-          <a:xfrm>
-            <a:off x="12192000" y="4589253"/>
-            <a:ext cx="914400" cy="914400"/>
-          </a:xfrm>
-          <a:prstGeom prst="rect">
-            <a:avLst/>
-          </a:prstGeom>
-        </p:spPr>
-        <p:style>
-          <a:lnRef idx="2">
-            <a:schemeClr val="accent1">
-              <a:shade val="15000"/>
-            </a:schemeClr>
-          </a:lnRef>
-          <a:fillRef idx="1">
-            <a:schemeClr val="accent1"/>
-          </a:fillRef>
-          <a:effectRef idx="0">
-            <a:schemeClr val="accent1"/>
-          </a:effectRef>
-          <a:fontRef idx="minor">
-            <a:schemeClr val="lt1"/>
-          </a:fontRef>
-        </p:style>
-        <p:txBody>
-          <a:bodyPr rtlCol="0" anchor="ctr"/>
-          <a:lstStyle/>
-          <a:p>
-            <a:pPr algn="ctr"/>
-            <a:endParaRPr lang="en-US"/>
-          </a:p>
-        </p:txBody>
-      </p:sp>
-      <p:sp>
-        <p:nvSpPr>
-          <p:cNvPr id="19" name="TextBox 18">
-            <a:extLst>
-              <a:ext uri="{FF2B5EF4-FFF2-40B4-BE49-F238E27FC236}">
-                <a16:creationId xmlns:a16="http://schemas.microsoft.com/office/drawing/2014/main" id="{9EC163EB-6A24-156D-1AEF-32E314BF12D5}"/>
-              </a:ext>
-            </a:extLst>
-          </p:cNvPr>
-          <p:cNvSpPr txBox="1"/>
-          <p:nvPr/>
-        </p:nvSpPr>
-        <p:spPr>
-          <a:xfrm>
-            <a:off x="5039419" y="4253209"/>
-            <a:ext cx="703911" cy="292388"/>
-          </a:xfrm>
-          <a:prstGeom prst="rect">
-            <a:avLst/>
-          </a:prstGeom>
-          <a:noFill/>
-        </p:spPr>
-        <p:txBody>
-          <a:bodyPr wrap="none" rtlCol="0">
-            <a:spAutoFit/>
-          </a:bodyPr>
-          <a:lstStyle/>
-          <a:p>
-            <a:r>
-              <a:rPr lang="en-US" sz="1300" dirty="0">
-                <a:latin typeface="+mj-lt"/>
-              </a:rPr>
-              <a:t>DPOAE</a:t>
-            </a:r>
-          </a:p>
-        </p:txBody>
-      </p:sp>
+              </a:endParaRPr>
+            </a:p>
+          </p:txBody>
+        </p:sp>
+        <p:sp>
+          <p:nvSpPr>
+            <p:cNvPr id="19" name="TextBox 18">
+              <a:extLst>
+                <a:ext uri="{FF2B5EF4-FFF2-40B4-BE49-F238E27FC236}">
+                  <a16:creationId xmlns:a16="http://schemas.microsoft.com/office/drawing/2014/main" id="{9EC163EB-6A24-156D-1AEF-32E314BF12D5}"/>
+                </a:ext>
+              </a:extLst>
+            </p:cNvPr>
+            <p:cNvSpPr txBox="1"/>
+            <p:nvPr/>
+          </p:nvSpPr>
+          <p:spPr>
+            <a:xfrm>
+              <a:off x="5039419" y="4253209"/>
+              <a:ext cx="703911" cy="292388"/>
+            </a:xfrm>
+            <a:prstGeom prst="rect">
+              <a:avLst/>
+            </a:prstGeom>
+            <a:noFill/>
+          </p:spPr>
+          <p:txBody>
+            <a:bodyPr wrap="none" rtlCol="0">
+              <a:spAutoFit/>
+            </a:bodyPr>
+            <a:lstStyle/>
+            <a:p>
+              <a:r>
+                <a:rPr lang="en-US" sz="1300" dirty="0">
+                  <a:latin typeface="+mj-lt"/>
+                </a:rPr>
+                <a:t>DPOAE</a:t>
+              </a:r>
+            </a:p>
+          </p:txBody>
+        </p:sp>
+      </p:grpSp>
     </p:spTree>
     <p:extLst>
       <p:ext uri="{BB962C8B-B14F-4D97-AF65-F5344CB8AC3E}">
@@ -5853,10 +5740,10 @@
       </p:grpSpPr>
       <p:grpSp>
         <p:nvGrpSpPr>
-          <p:cNvPr id="6" name="Group 5">
-            <a:extLst>
-              <a:ext uri="{FF2B5EF4-FFF2-40B4-BE49-F238E27FC236}">
-                <a16:creationId xmlns:a16="http://schemas.microsoft.com/office/drawing/2014/main" id="{4D4199F5-0950-0B7D-692D-A5BE0454F56A}"/>
+          <p:cNvPr id="4" name="Group 3">
+            <a:extLst>
+              <a:ext uri="{FF2B5EF4-FFF2-40B4-BE49-F238E27FC236}">
+                <a16:creationId xmlns:a16="http://schemas.microsoft.com/office/drawing/2014/main" id="{A89F9D3F-55B3-06D6-8DFD-79DA92CE5ED5}"/>
               </a:ext>
             </a:extLst>
           </p:cNvPr>
@@ -5865,70 +5752,18 @@
         </p:nvGrpSpPr>
         <p:grpSpPr>
           <a:xfrm>
-            <a:off x="3142601" y="108155"/>
+            <a:off x="3162107" y="120445"/>
             <a:ext cx="5867785" cy="6617110"/>
-            <a:chOff x="3142601" y="108155"/>
+            <a:chOff x="3162107" y="120445"/>
             <a:chExt cx="5867785" cy="6617110"/>
           </a:xfrm>
         </p:grpSpPr>
-        <p:sp>
-          <p:nvSpPr>
-            <p:cNvPr id="7" name="Rectangle 6">
+        <p:grpSp>
+          <p:nvGrpSpPr>
+            <p:cNvPr id="6" name="Group 5">
               <a:extLst>
                 <a:ext uri="{FF2B5EF4-FFF2-40B4-BE49-F238E27FC236}">
-                  <a16:creationId xmlns:a16="http://schemas.microsoft.com/office/drawing/2014/main" id="{FFEDE237-E189-BA08-87B9-9F39E0065E92}"/>
-                </a:ext>
-              </a:extLst>
-            </p:cNvPr>
-            <p:cNvSpPr/>
-            <p:nvPr/>
-          </p:nvSpPr>
-          <p:spPr>
-            <a:xfrm>
-              <a:off x="5702860" y="5688862"/>
-              <a:ext cx="678810" cy="311009"/>
-            </a:xfrm>
-            <a:prstGeom prst="rect">
-              <a:avLst/>
-            </a:prstGeom>
-            <a:solidFill>
-              <a:srgbClr val="33AAEE"/>
-            </a:solidFill>
-            <a:ln>
-              <a:noFill/>
-            </a:ln>
-          </p:spPr>
-          <p:style>
-            <a:lnRef idx="2">
-              <a:schemeClr val="accent1">
-                <a:shade val="15000"/>
-              </a:schemeClr>
-            </a:lnRef>
-            <a:fillRef idx="1">
-              <a:schemeClr val="accent1"/>
-            </a:fillRef>
-            <a:effectRef idx="0">
-              <a:schemeClr val="accent1"/>
-            </a:effectRef>
-            <a:fontRef idx="minor">
-              <a:schemeClr val="lt1"/>
-            </a:fontRef>
-          </p:style>
-          <p:txBody>
-            <a:bodyPr rtlCol="0" anchor="ctr"/>
-            <a:lstStyle/>
-            <a:p>
-              <a:pPr algn="ctr"/>
-              <a:endParaRPr lang="en-US"/>
-            </a:p>
-          </p:txBody>
-        </p:sp>
-        <p:grpSp>
-          <p:nvGrpSpPr>
-            <p:cNvPr id="8" name="Group 7">
-              <a:extLst>
-                <a:ext uri="{FF2B5EF4-FFF2-40B4-BE49-F238E27FC236}">
-                  <a16:creationId xmlns:a16="http://schemas.microsoft.com/office/drawing/2014/main" id="{6ADC7AAA-72A0-2397-52FD-30AEF3056322}"/>
+                  <a16:creationId xmlns:a16="http://schemas.microsoft.com/office/drawing/2014/main" id="{4D4199F5-0950-0B7D-692D-A5BE0454F56A}"/>
                 </a:ext>
               </a:extLst>
             </p:cNvPr>
@@ -5937,111 +5772,18 @@
           </p:nvGrpSpPr>
           <p:grpSpPr>
             <a:xfrm>
-              <a:off x="3142601" y="108155"/>
+              <a:off x="3162107" y="120445"/>
               <a:ext cx="5867785" cy="6617110"/>
               <a:chOff x="3142601" y="108155"/>
               <a:chExt cx="5867785" cy="6617110"/>
             </a:xfrm>
           </p:grpSpPr>
-          <p:pic>
-            <p:nvPicPr>
-              <p:cNvPr id="9" name="Picture 8">
+          <p:sp>
+            <p:nvSpPr>
+              <p:cNvPr id="7" name="Rectangle 6">
                 <a:extLst>
                   <a:ext uri="{FF2B5EF4-FFF2-40B4-BE49-F238E27FC236}">
-                    <a16:creationId xmlns:a16="http://schemas.microsoft.com/office/drawing/2014/main" id="{B4B32330-F8B9-1594-636A-592ED40566F7}"/>
-                  </a:ext>
-                </a:extLst>
-              </p:cNvPr>
-              <p:cNvPicPr>
-                <a:picLocks noChangeAspect="1"/>
-              </p:cNvPicPr>
-              <p:nvPr/>
-            </p:nvPicPr>
-            <p:blipFill>
-              <a:blip r:embed="rId2"/>
-              <a:srcRect l="23569" t="12201" r="25360" b="18743"/>
-              <a:stretch/>
-            </p:blipFill>
-            <p:spPr>
-              <a:xfrm>
-                <a:off x="5515897" y="2802194"/>
-                <a:ext cx="1120877" cy="1145124"/>
-              </a:xfrm>
-              <a:prstGeom prst="rect">
-                <a:avLst/>
-              </a:prstGeom>
-            </p:spPr>
-          </p:pic>
-          <p:pic>
-            <p:nvPicPr>
-              <p:cNvPr id="10" name="Picture 9">
-                <a:extLst>
-                  <a:ext uri="{FF2B5EF4-FFF2-40B4-BE49-F238E27FC236}">
-                    <a16:creationId xmlns:a16="http://schemas.microsoft.com/office/drawing/2014/main" id="{BA224756-A64F-C5D9-7E1C-5744781CF2E6}"/>
-                  </a:ext>
-                </a:extLst>
-              </p:cNvPr>
-              <p:cNvPicPr>
-                <a:picLocks noChangeAspect="1"/>
-              </p:cNvPicPr>
-              <p:nvPr/>
-            </p:nvPicPr>
-            <p:blipFill>
-              <a:blip r:embed="rId3"/>
-              <a:srcRect l="54980" t="72026" r="39565" b="21315"/>
-              <a:stretch/>
-            </p:blipFill>
-            <p:spPr>
-              <a:xfrm>
-                <a:off x="3773277" y="5249275"/>
-                <a:ext cx="412899" cy="569618"/>
-              </a:xfrm>
-              <a:prstGeom prst="rect">
-                <a:avLst/>
-              </a:prstGeom>
-              <a:ln>
-                <a:noFill/>
-              </a:ln>
-            </p:spPr>
-          </p:pic>
-          <p:pic>
-            <p:nvPicPr>
-              <p:cNvPr id="11" name="Picture 10">
-                <a:extLst>
-                  <a:ext uri="{FF2B5EF4-FFF2-40B4-BE49-F238E27FC236}">
-                    <a16:creationId xmlns:a16="http://schemas.microsoft.com/office/drawing/2014/main" id="{025D137C-1CC4-CA4F-E045-EA6C07EB82D9}"/>
-                  </a:ext>
-                </a:extLst>
-              </p:cNvPr>
-              <p:cNvPicPr>
-                <a:picLocks noChangeAspect="1"/>
-              </p:cNvPicPr>
-              <p:nvPr/>
-            </p:nvPicPr>
-            <p:blipFill>
-              <a:blip r:embed="rId3"/>
-              <a:srcRect l="54980" t="72026" r="39565" b="21315"/>
-              <a:stretch/>
-            </p:blipFill>
-            <p:spPr>
-              <a:xfrm>
-                <a:off x="5259288" y="5286129"/>
-                <a:ext cx="443572" cy="532764"/>
-              </a:xfrm>
-              <a:prstGeom prst="rect">
-                <a:avLst/>
-              </a:prstGeom>
-              <a:ln>
-                <a:noFill/>
-              </a:ln>
-            </p:spPr>
-          </p:pic>
-          <p:sp>
-            <p:nvSpPr>
-              <p:cNvPr id="12" name="Rectangle 11">
-                <a:extLst>
-                  <a:ext uri="{FF2B5EF4-FFF2-40B4-BE49-F238E27FC236}">
-                    <a16:creationId xmlns:a16="http://schemas.microsoft.com/office/drawing/2014/main" id="{0F356553-95AF-2B06-58BC-70D416BEEAA2}"/>
+                    <a16:creationId xmlns:a16="http://schemas.microsoft.com/office/drawing/2014/main" id="{FFEDE237-E189-BA08-87B9-9F39E0065E92}"/>
                   </a:ext>
                 </a:extLst>
               </p:cNvPr>
@@ -6050,19 +5792,17 @@
             </p:nvSpPr>
             <p:spPr>
               <a:xfrm>
-                <a:off x="3142601" y="108155"/>
-                <a:ext cx="5867785" cy="6617110"/>
+                <a:off x="5702860" y="5688862"/>
+                <a:ext cx="678810" cy="311009"/>
               </a:xfrm>
               <a:prstGeom prst="rect">
                 <a:avLst/>
               </a:prstGeom>
               <a:solidFill>
-                <a:schemeClr val="bg1"/>
+                <a:srgbClr val="33AAEE"/>
               </a:solidFill>
               <a:ln>
-                <a:solidFill>
-                  <a:schemeClr val="tx1"/>
-                </a:solidFill>
+                <a:noFill/>
               </a:ln>
             </p:spPr>
             <p:style>
@@ -6090,211 +5830,371 @@
               </a:p>
             </p:txBody>
           </p:sp>
-          <p:sp>
-            <p:nvSpPr>
-              <p:cNvPr id="14" name="TextBox 13">
+          <p:grpSp>
+            <p:nvGrpSpPr>
+              <p:cNvPr id="8" name="Group 7">
                 <a:extLst>
                   <a:ext uri="{FF2B5EF4-FFF2-40B4-BE49-F238E27FC236}">
-                    <a16:creationId xmlns:a16="http://schemas.microsoft.com/office/drawing/2014/main" id="{4F286D99-E606-52E4-0C8D-EBD4D7175291}"/>
+                    <a16:creationId xmlns:a16="http://schemas.microsoft.com/office/drawing/2014/main" id="{6ADC7AAA-72A0-2397-52FD-30AEF3056322}"/>
                   </a:ext>
                 </a:extLst>
               </p:cNvPr>
-              <p:cNvSpPr txBox="1"/>
+              <p:cNvGrpSpPr/>
               <p:nvPr/>
-            </p:nvSpPr>
-            <p:spPr>
+            </p:nvGrpSpPr>
+            <p:grpSpPr>
               <a:xfrm>
-                <a:off x="3539699" y="364730"/>
-                <a:ext cx="5418480" cy="532775"/>
+                <a:off x="3142601" y="108155"/>
+                <a:ext cx="5867785" cy="6617110"/>
+                <a:chOff x="3142601" y="108155"/>
+                <a:chExt cx="5867785" cy="6617110"/>
               </a:xfrm>
-              <a:prstGeom prst="rect">
-                <a:avLst/>
-              </a:prstGeom>
-              <a:noFill/>
-            </p:spPr>
-            <p:txBody>
-              <a:bodyPr wrap="square" rtlCol="0">
-                <a:spAutoFit/>
-              </a:bodyPr>
-              <a:lstStyle/>
-              <a:p>
-                <a:pPr defTabSz="1453896">
-                  <a:spcAft>
-                    <a:spcPts val="600"/>
-                  </a:spcAft>
-                </a:pPr>
-                <a:r>
-                  <a:rPr lang="en-US" sz="2862" b="1" kern="1200" dirty="0">
-                    <a:solidFill>
-                      <a:schemeClr val="tx1"/>
-                    </a:solidFill>
-                    <a:latin typeface="+mn-lt"/>
-                    <a:ea typeface="+mn-ea"/>
-                    <a:cs typeface="+mn-cs"/>
-                  </a:rPr>
-                  <a:t>Results: Swept DPOAE</a:t>
-                </a:r>
-                <a:endParaRPr lang="en-US" b="1" dirty="0"/>
-              </a:p>
-            </p:txBody>
-          </p:sp>
-          <p:sp>
-            <p:nvSpPr>
-              <p:cNvPr id="15" name="Rectangle 14">
-                <a:extLst>
-                  <a:ext uri="{FF2B5EF4-FFF2-40B4-BE49-F238E27FC236}">
-                    <a16:creationId xmlns:a16="http://schemas.microsoft.com/office/drawing/2014/main" id="{D0828BE7-D62F-2D15-F185-844CB2E85430}"/>
-                  </a:ext>
-                </a:extLst>
-              </p:cNvPr>
-              <p:cNvSpPr/>
-              <p:nvPr/>
-            </p:nvSpPr>
-            <p:spPr>
-              <a:xfrm>
-                <a:off x="6359256" y="3955038"/>
-                <a:ext cx="1473800" cy="457900"/>
-              </a:xfrm>
-              <a:prstGeom prst="rect">
-                <a:avLst/>
-              </a:prstGeom>
-              <a:solidFill>
-                <a:schemeClr val="bg1"/>
-              </a:solidFill>
-              <a:ln>
+            </p:grpSpPr>
+            <p:pic>
+              <p:nvPicPr>
+                <p:cNvPr id="9" name="Picture 8">
+                  <a:extLst>
+                    <a:ext uri="{FF2B5EF4-FFF2-40B4-BE49-F238E27FC236}">
+                      <a16:creationId xmlns:a16="http://schemas.microsoft.com/office/drawing/2014/main" id="{B4B32330-F8B9-1594-636A-592ED40566F7}"/>
+                    </a:ext>
+                  </a:extLst>
+                </p:cNvPr>
+                <p:cNvPicPr>
+                  <a:picLocks noChangeAspect="1"/>
+                </p:cNvPicPr>
+                <p:nvPr/>
+              </p:nvPicPr>
+              <p:blipFill>
+                <a:blip r:embed="rId2"/>
+                <a:srcRect l="23569" t="12201" r="25360" b="18743"/>
+                <a:stretch/>
+              </p:blipFill>
+              <p:spPr>
+                <a:xfrm>
+                  <a:off x="5515897" y="2802194"/>
+                  <a:ext cx="1120877" cy="1145124"/>
+                </a:xfrm>
+                <a:prstGeom prst="rect">
+                  <a:avLst/>
+                </a:prstGeom>
+              </p:spPr>
+            </p:pic>
+            <p:pic>
+              <p:nvPicPr>
+                <p:cNvPr id="10" name="Picture 9">
+                  <a:extLst>
+                    <a:ext uri="{FF2B5EF4-FFF2-40B4-BE49-F238E27FC236}">
+                      <a16:creationId xmlns:a16="http://schemas.microsoft.com/office/drawing/2014/main" id="{BA224756-A64F-C5D9-7E1C-5744781CF2E6}"/>
+                    </a:ext>
+                  </a:extLst>
+                </p:cNvPr>
+                <p:cNvPicPr>
+                  <a:picLocks noChangeAspect="1"/>
+                </p:cNvPicPr>
+                <p:nvPr/>
+              </p:nvPicPr>
+              <p:blipFill>
+                <a:blip r:embed="rId3"/>
+                <a:srcRect l="54980" t="72026" r="39565" b="21315"/>
+                <a:stretch/>
+              </p:blipFill>
+              <p:spPr>
+                <a:xfrm>
+                  <a:off x="3773277" y="5249275"/>
+                  <a:ext cx="412899" cy="569618"/>
+                </a:xfrm>
+                <a:prstGeom prst="rect">
+                  <a:avLst/>
+                </a:prstGeom>
+                <a:ln>
+                  <a:noFill/>
+                </a:ln>
+              </p:spPr>
+            </p:pic>
+            <p:pic>
+              <p:nvPicPr>
+                <p:cNvPr id="11" name="Picture 10">
+                  <a:extLst>
+                    <a:ext uri="{FF2B5EF4-FFF2-40B4-BE49-F238E27FC236}">
+                      <a16:creationId xmlns:a16="http://schemas.microsoft.com/office/drawing/2014/main" id="{025D137C-1CC4-CA4F-E045-EA6C07EB82D9}"/>
+                    </a:ext>
+                  </a:extLst>
+                </p:cNvPr>
+                <p:cNvPicPr>
+                  <a:picLocks noChangeAspect="1"/>
+                </p:cNvPicPr>
+                <p:nvPr/>
+              </p:nvPicPr>
+              <p:blipFill>
+                <a:blip r:embed="rId3"/>
+                <a:srcRect l="54980" t="72026" r="39565" b="21315"/>
+                <a:stretch/>
+              </p:blipFill>
+              <p:spPr>
+                <a:xfrm>
+                  <a:off x="5259288" y="5286129"/>
+                  <a:ext cx="443572" cy="532764"/>
+                </a:xfrm>
+                <a:prstGeom prst="rect">
+                  <a:avLst/>
+                </a:prstGeom>
+                <a:ln>
+                  <a:noFill/>
+                </a:ln>
+              </p:spPr>
+            </p:pic>
+            <p:sp>
+              <p:nvSpPr>
+                <p:cNvPr id="12" name="Rectangle 11">
+                  <a:extLst>
+                    <a:ext uri="{FF2B5EF4-FFF2-40B4-BE49-F238E27FC236}">
+                      <a16:creationId xmlns:a16="http://schemas.microsoft.com/office/drawing/2014/main" id="{0F356553-95AF-2B06-58BC-70D416BEEAA2}"/>
+                    </a:ext>
+                  </a:extLst>
+                </p:cNvPr>
+                <p:cNvSpPr/>
+                <p:nvPr/>
+              </p:nvSpPr>
+              <p:spPr>
+                <a:xfrm>
+                  <a:off x="3142601" y="108155"/>
+                  <a:ext cx="5867785" cy="6617110"/>
+                </a:xfrm>
+                <a:prstGeom prst="rect">
+                  <a:avLst/>
+                </a:prstGeom>
                 <a:solidFill>
                   <a:schemeClr val="bg1"/>
                 </a:solidFill>
-              </a:ln>
-            </p:spPr>
-            <p:style>
-              <a:lnRef idx="2">
-                <a:schemeClr val="accent1">
-                  <a:shade val="15000"/>
-                </a:schemeClr>
-              </a:lnRef>
-              <a:fillRef idx="1">
-                <a:schemeClr val="accent1"/>
-              </a:fillRef>
-              <a:effectRef idx="0">
-                <a:schemeClr val="accent1"/>
-              </a:effectRef>
-              <a:fontRef idx="minor">
-                <a:schemeClr val="lt1"/>
-              </a:fontRef>
-            </p:style>
-            <p:txBody>
-              <a:bodyPr rtlCol="0" anchor="ctr"/>
-              <a:lstStyle/>
-              <a:p>
-                <a:pPr algn="ctr"/>
-                <a:endParaRPr lang="en-US"/>
-              </a:p>
-            </p:txBody>
-          </p:sp>
+                <a:ln>
+                  <a:solidFill>
+                    <a:schemeClr val="tx1"/>
+                  </a:solidFill>
+                </a:ln>
+              </p:spPr>
+              <p:style>
+                <a:lnRef idx="2">
+                  <a:schemeClr val="accent1">
+                    <a:shade val="15000"/>
+                  </a:schemeClr>
+                </a:lnRef>
+                <a:fillRef idx="1">
+                  <a:schemeClr val="accent1"/>
+                </a:fillRef>
+                <a:effectRef idx="0">
+                  <a:schemeClr val="accent1"/>
+                </a:effectRef>
+                <a:fontRef idx="minor">
+                  <a:schemeClr val="lt1"/>
+                </a:fontRef>
+              </p:style>
+              <p:txBody>
+                <a:bodyPr rtlCol="0" anchor="ctr"/>
+                <a:lstStyle/>
+                <a:p>
+                  <a:pPr algn="ctr"/>
+                  <a:endParaRPr lang="en-US"/>
+                </a:p>
+              </p:txBody>
+            </p:sp>
+            <p:sp>
+              <p:nvSpPr>
+                <p:cNvPr id="14" name="TextBox 13">
+                  <a:extLst>
+                    <a:ext uri="{FF2B5EF4-FFF2-40B4-BE49-F238E27FC236}">
+                      <a16:creationId xmlns:a16="http://schemas.microsoft.com/office/drawing/2014/main" id="{4F286D99-E606-52E4-0C8D-EBD4D7175291}"/>
+                    </a:ext>
+                  </a:extLst>
+                </p:cNvPr>
+                <p:cNvSpPr txBox="1"/>
+                <p:nvPr/>
+              </p:nvSpPr>
+              <p:spPr>
+                <a:xfrm>
+                  <a:off x="3539699" y="364730"/>
+                  <a:ext cx="5418480" cy="532775"/>
+                </a:xfrm>
+                <a:prstGeom prst="rect">
+                  <a:avLst/>
+                </a:prstGeom>
+                <a:noFill/>
+              </p:spPr>
+              <p:txBody>
+                <a:bodyPr wrap="square" rtlCol="0">
+                  <a:spAutoFit/>
+                </a:bodyPr>
+                <a:lstStyle/>
+                <a:p>
+                  <a:pPr defTabSz="1453896">
+                    <a:spcAft>
+                      <a:spcPts val="600"/>
+                    </a:spcAft>
+                  </a:pPr>
+                  <a:r>
+                    <a:rPr lang="en-US" sz="2862" b="1" kern="1200" dirty="0">
+                      <a:solidFill>
+                        <a:schemeClr val="tx1"/>
+                      </a:solidFill>
+                      <a:latin typeface="+mn-lt"/>
+                      <a:ea typeface="+mn-ea"/>
+                      <a:cs typeface="+mn-cs"/>
+                    </a:rPr>
+                    <a:t>Results: Swept DPOAE</a:t>
+                  </a:r>
+                  <a:endParaRPr lang="en-US" b="1" dirty="0"/>
+                </a:p>
+              </p:txBody>
+            </p:sp>
+            <p:sp>
+              <p:nvSpPr>
+                <p:cNvPr id="15" name="Rectangle 14">
+                  <a:extLst>
+                    <a:ext uri="{FF2B5EF4-FFF2-40B4-BE49-F238E27FC236}">
+                      <a16:creationId xmlns:a16="http://schemas.microsoft.com/office/drawing/2014/main" id="{D0828BE7-D62F-2D15-F185-844CB2E85430}"/>
+                    </a:ext>
+                  </a:extLst>
+                </p:cNvPr>
+                <p:cNvSpPr/>
+                <p:nvPr/>
+              </p:nvSpPr>
+              <p:spPr>
+                <a:xfrm>
+                  <a:off x="6359256" y="3955038"/>
+                  <a:ext cx="1473800" cy="457900"/>
+                </a:xfrm>
+                <a:prstGeom prst="rect">
+                  <a:avLst/>
+                </a:prstGeom>
+                <a:solidFill>
+                  <a:schemeClr val="bg1"/>
+                </a:solidFill>
+                <a:ln>
+                  <a:solidFill>
+                    <a:schemeClr val="bg1"/>
+                  </a:solidFill>
+                </a:ln>
+              </p:spPr>
+              <p:style>
+                <a:lnRef idx="2">
+                  <a:schemeClr val="accent1">
+                    <a:shade val="15000"/>
+                  </a:schemeClr>
+                </a:lnRef>
+                <a:fillRef idx="1">
+                  <a:schemeClr val="accent1"/>
+                </a:fillRef>
+                <a:effectRef idx="0">
+                  <a:schemeClr val="accent1"/>
+                </a:effectRef>
+                <a:fontRef idx="minor">
+                  <a:schemeClr val="lt1"/>
+                </a:fontRef>
+              </p:style>
+              <p:txBody>
+                <a:bodyPr rtlCol="0" anchor="ctr"/>
+                <a:lstStyle/>
+                <a:p>
+                  <a:pPr algn="ctr"/>
+                  <a:endParaRPr lang="en-US"/>
+                </a:p>
+              </p:txBody>
+            </p:sp>
+          </p:grpSp>
         </p:grpSp>
+        <p:sp>
+          <p:nvSpPr>
+            <p:cNvPr id="17" name="Flowchart: Terminator 16">
+              <a:extLst>
+                <a:ext uri="{FF2B5EF4-FFF2-40B4-BE49-F238E27FC236}">
+                  <a16:creationId xmlns:a16="http://schemas.microsoft.com/office/drawing/2014/main" id="{F3B818B2-CDB1-4AEC-6D27-2CCA3EA6029A}"/>
+                </a:ext>
+              </a:extLst>
+            </p:cNvPr>
+            <p:cNvSpPr/>
+            <p:nvPr/>
+          </p:nvSpPr>
+          <p:spPr>
+            <a:xfrm>
+              <a:off x="5412451" y="5920355"/>
+              <a:ext cx="1327450" cy="546260"/>
+            </a:xfrm>
+            <a:prstGeom prst="flowChartTerminator">
+              <a:avLst/>
+            </a:prstGeom>
+            <a:solidFill>
+              <a:srgbClr val="33AAEE"/>
+            </a:solidFill>
+            <a:ln>
+              <a:noFill/>
+            </a:ln>
+            <a:effectLst>
+              <a:outerShdw blurRad="63500" sx="102000" sy="102000" algn="ctr" rotWithShape="0">
+                <a:prstClr val="black">
+                  <a:alpha val="40000"/>
+                </a:prstClr>
+              </a:outerShdw>
+            </a:effectLst>
+          </p:spPr>
+          <p:style>
+            <a:lnRef idx="2">
+              <a:schemeClr val="accent1">
+                <a:shade val="15000"/>
+              </a:schemeClr>
+            </a:lnRef>
+            <a:fillRef idx="1">
+              <a:schemeClr val="accent1"/>
+            </a:fillRef>
+            <a:effectRef idx="0">
+              <a:schemeClr val="accent1"/>
+            </a:effectRef>
+            <a:fontRef idx="minor">
+              <a:schemeClr val="lt1"/>
+            </a:fontRef>
+          </p:style>
+          <p:txBody>
+            <a:bodyPr rtlCol="0" anchor="ctr"/>
+            <a:lstStyle/>
+            <a:p>
+              <a:pPr algn="ctr"/>
+              <a:r>
+                <a:rPr lang="en-US" sz="2400" dirty="0"/>
+                <a:t>Finish</a:t>
+              </a:r>
+              <a:endParaRPr lang="en-US" dirty="0"/>
+            </a:p>
+          </p:txBody>
+        </p:sp>
+        <p:pic>
+          <p:nvPicPr>
+            <p:cNvPr id="3" name="Picture 2">
+              <a:extLst>
+                <a:ext uri="{FF2B5EF4-FFF2-40B4-BE49-F238E27FC236}">
+                  <a16:creationId xmlns:a16="http://schemas.microsoft.com/office/drawing/2014/main" id="{B1CD184D-0421-5DA0-F893-12B29A75216D}"/>
+                </a:ext>
+              </a:extLst>
+            </p:cNvPr>
+            <p:cNvPicPr>
+              <a:picLocks noChangeAspect="1"/>
+            </p:cNvPicPr>
+            <p:nvPr/>
+          </p:nvPicPr>
+          <p:blipFill>
+            <a:blip r:embed="rId4"/>
+            <a:stretch>
+              <a:fillRect/>
+            </a:stretch>
+          </p:blipFill>
+          <p:spPr>
+            <a:xfrm>
+              <a:off x="3345212" y="1363570"/>
+              <a:ext cx="5503333" cy="4127500"/>
+            </a:xfrm>
+            <a:prstGeom prst="rect">
+              <a:avLst/>
+            </a:prstGeom>
+          </p:spPr>
+        </p:pic>
       </p:grpSp>
-      <p:pic>
-        <p:nvPicPr>
-          <p:cNvPr id="5" name="Picture 4">
-            <a:extLst>
-              <a:ext uri="{FF2B5EF4-FFF2-40B4-BE49-F238E27FC236}">
-                <a16:creationId xmlns:a16="http://schemas.microsoft.com/office/drawing/2014/main" id="{9F20DB1F-0429-8814-0076-D4DFA9DF3188}"/>
-              </a:ext>
-            </a:extLst>
-          </p:cNvPr>
-          <p:cNvPicPr>
-            <a:picLocks noChangeAspect="1"/>
-          </p:cNvPicPr>
-          <p:nvPr/>
-        </p:nvPicPr>
-        <p:blipFill>
-          <a:blip r:embed="rId4">
-            <a:extLst>
-              <a:ext uri="{28A0092B-C50C-407E-A947-70E740481C1C}">
-                <a14:useLocalDpi xmlns:a14="http://schemas.microsoft.com/office/drawing/2010/main" val="0"/>
-              </a:ext>
-            </a:extLst>
-          </a:blip>
-          <a:srcRect l="1826" t="21695" r="6766" b="454"/>
-          <a:stretch/>
-        </p:blipFill>
-        <p:spPr>
-          <a:xfrm>
-            <a:off x="3706766" y="1502943"/>
-            <a:ext cx="4670997" cy="3581820"/>
-          </a:xfrm>
-          <a:prstGeom prst="rect">
-            <a:avLst/>
-          </a:prstGeom>
-          <a:ln>
-            <a:noFill/>
-          </a:ln>
-        </p:spPr>
-      </p:pic>
-      <p:sp>
-        <p:nvSpPr>
-          <p:cNvPr id="17" name="Flowchart: Terminator 16">
-            <a:extLst>
-              <a:ext uri="{FF2B5EF4-FFF2-40B4-BE49-F238E27FC236}">
-                <a16:creationId xmlns:a16="http://schemas.microsoft.com/office/drawing/2014/main" id="{F3B818B2-CDB1-4AEC-6D27-2CCA3EA6029A}"/>
-              </a:ext>
-            </a:extLst>
-          </p:cNvPr>
-          <p:cNvSpPr/>
-          <p:nvPr/>
-        </p:nvSpPr>
-        <p:spPr>
-          <a:xfrm>
-            <a:off x="5412451" y="5920355"/>
-            <a:ext cx="1327450" cy="546260"/>
-          </a:xfrm>
-          <a:prstGeom prst="flowChartTerminator">
-            <a:avLst/>
-          </a:prstGeom>
-          <a:solidFill>
-            <a:srgbClr val="33AAEE"/>
-          </a:solidFill>
-          <a:ln>
-            <a:noFill/>
-          </a:ln>
-          <a:effectLst>
-            <a:outerShdw blurRad="63500" sx="102000" sy="102000" algn="ctr" rotWithShape="0">
-              <a:prstClr val="black">
-                <a:alpha val="40000"/>
-              </a:prstClr>
-            </a:outerShdw>
-          </a:effectLst>
-        </p:spPr>
-        <p:style>
-          <a:lnRef idx="2">
-            <a:schemeClr val="accent1">
-              <a:shade val="15000"/>
-            </a:schemeClr>
-          </a:lnRef>
-          <a:fillRef idx="1">
-            <a:schemeClr val="accent1"/>
-          </a:fillRef>
-          <a:effectRef idx="0">
-            <a:schemeClr val="accent1"/>
-          </a:effectRef>
-          <a:fontRef idx="minor">
-            <a:schemeClr val="lt1"/>
-          </a:fontRef>
-        </p:style>
-        <p:txBody>
-          <a:bodyPr rtlCol="0" anchor="ctr"/>
-          <a:lstStyle/>
-          <a:p>
-            <a:pPr algn="ctr"/>
-            <a:r>
-              <a:rPr lang="en-US" sz="2400" dirty="0"/>
-              <a:t>Finish</a:t>
-            </a:r>
-            <a:endParaRPr lang="en-US" dirty="0"/>
-          </a:p>
-        </p:txBody>
-      </p:sp>
     </p:spTree>
     <p:extLst>
       <p:ext uri="{BB962C8B-B14F-4D97-AF65-F5344CB8AC3E}">

--- a/Specifications/dpgram/GUI-Screens.pptx
+++ b/Specifications/dpgram/GUI-Screens.pptx
@@ -261,7 +261,7 @@
           <a:p>
             <a:fld id="{6E783203-F72E-42D3-9F56-E7123AD26E23}" type="datetimeFigureOut">
               <a:rPr lang="en-US" smtClean="0"/>
-              <a:t>8/7/2026</a:t>
+              <a:t>8/19/2026</a:t>
             </a:fld>
             <a:endParaRPr lang="en-US"/>
           </a:p>
@@ -459,7 +459,7 @@
           <a:p>
             <a:fld id="{6E783203-F72E-42D3-9F56-E7123AD26E23}" type="datetimeFigureOut">
               <a:rPr lang="en-US" smtClean="0"/>
-              <a:t>8/7/2026</a:t>
+              <a:t>8/19/2026</a:t>
             </a:fld>
             <a:endParaRPr lang="en-US"/>
           </a:p>
@@ -667,7 +667,7 @@
           <a:p>
             <a:fld id="{6E783203-F72E-42D3-9F56-E7123AD26E23}" type="datetimeFigureOut">
               <a:rPr lang="en-US" smtClean="0"/>
-              <a:t>8/7/2026</a:t>
+              <a:t>8/19/2026</a:t>
             </a:fld>
             <a:endParaRPr lang="en-US"/>
           </a:p>
@@ -865,7 +865,7 @@
           <a:p>
             <a:fld id="{6E783203-F72E-42D3-9F56-E7123AD26E23}" type="datetimeFigureOut">
               <a:rPr lang="en-US" smtClean="0"/>
-              <a:t>8/7/2026</a:t>
+              <a:t>8/19/2026</a:t>
             </a:fld>
             <a:endParaRPr lang="en-US"/>
           </a:p>
@@ -1140,7 +1140,7 @@
           <a:p>
             <a:fld id="{6E783203-F72E-42D3-9F56-E7123AD26E23}" type="datetimeFigureOut">
               <a:rPr lang="en-US" smtClean="0"/>
-              <a:t>8/7/2026</a:t>
+              <a:t>8/19/2026</a:t>
             </a:fld>
             <a:endParaRPr lang="en-US"/>
           </a:p>
@@ -1405,7 +1405,7 @@
           <a:p>
             <a:fld id="{6E783203-F72E-42D3-9F56-E7123AD26E23}" type="datetimeFigureOut">
               <a:rPr lang="en-US" smtClean="0"/>
-              <a:t>8/7/2026</a:t>
+              <a:t>8/19/2026</a:t>
             </a:fld>
             <a:endParaRPr lang="en-US"/>
           </a:p>
@@ -1817,7 +1817,7 @@
           <a:p>
             <a:fld id="{6E783203-F72E-42D3-9F56-E7123AD26E23}" type="datetimeFigureOut">
               <a:rPr lang="en-US" smtClean="0"/>
-              <a:t>8/7/2026</a:t>
+              <a:t>8/19/2026</a:t>
             </a:fld>
             <a:endParaRPr lang="en-US"/>
           </a:p>
@@ -1958,7 +1958,7 @@
           <a:p>
             <a:fld id="{6E783203-F72E-42D3-9F56-E7123AD26E23}" type="datetimeFigureOut">
               <a:rPr lang="en-US" smtClean="0"/>
-              <a:t>8/7/2026</a:t>
+              <a:t>8/19/2026</a:t>
             </a:fld>
             <a:endParaRPr lang="en-US"/>
           </a:p>
@@ -2071,7 +2071,7 @@
           <a:p>
             <a:fld id="{6E783203-F72E-42D3-9F56-E7123AD26E23}" type="datetimeFigureOut">
               <a:rPr lang="en-US" smtClean="0"/>
-              <a:t>8/7/2026</a:t>
+              <a:t>8/19/2026</a:t>
             </a:fld>
             <a:endParaRPr lang="en-US"/>
           </a:p>
@@ -2382,7 +2382,7 @@
           <a:p>
             <a:fld id="{6E783203-F72E-42D3-9F56-E7123AD26E23}" type="datetimeFigureOut">
               <a:rPr lang="en-US" smtClean="0"/>
-              <a:t>8/7/2026</a:t>
+              <a:t>8/19/2026</a:t>
             </a:fld>
             <a:endParaRPr lang="en-US"/>
           </a:p>
@@ -2670,7 +2670,7 @@
           <a:p>
             <a:fld id="{6E783203-F72E-42D3-9F56-E7123AD26E23}" type="datetimeFigureOut">
               <a:rPr lang="en-US" smtClean="0"/>
-              <a:t>8/7/2026</a:t>
+              <a:t>8/19/2026</a:t>
             </a:fld>
             <a:endParaRPr lang="en-US"/>
           </a:p>
@@ -2911,7 +2911,7 @@
           <a:p>
             <a:fld id="{6E783203-F72E-42D3-9F56-E7123AD26E23}" type="datetimeFigureOut">
               <a:rPr lang="en-US" smtClean="0"/>
-              <a:t>8/7/2026</a:t>
+              <a:t>8/19/2026</a:t>
             </a:fld>
             <a:endParaRPr lang="en-US"/>
           </a:p>
@@ -3686,7 +3686,7 @@
                     <a:ea typeface="+mn-ea"/>
                     <a:cs typeface="+mn-cs"/>
                   </a:rPr>
-                  <a:t>Title: “DPGRAM” </a:t>
+                  <a:t>Title: “DP-gram” </a:t>
                 </a:r>
                 <a:endParaRPr lang="en-US" b="1" dirty="0"/>
               </a:p>
@@ -3826,14 +3826,14 @@
           <p:nvPr>
             <p:extLst>
               <p:ext uri="{D42A27DB-BD31-4B8C-83A1-F6EECF244321}">
-                <p14:modId xmlns:p14="http://schemas.microsoft.com/office/powerpoint/2010/main" val="2845407314"/>
+                <p14:modId xmlns:p14="http://schemas.microsoft.com/office/powerpoint/2010/main" val="3597752681"/>
               </p:ext>
             </p:extLst>
           </p:nvPr>
         </p:nvGraphicFramePr>
         <p:xfrm>
           <a:off x="3678348" y="1422249"/>
-          <a:ext cx="4795974" cy="2438400"/>
+          <a:ext cx="4795974" cy="1828800"/>
         </p:xfrm>
         <a:graphic>
           <a:graphicData uri="http://schemas.openxmlformats.org/drawingml/2006/table">
@@ -3930,7 +3930,7 @@
                             </a:schemeClr>
                           </a:solidFill>
                         </a:rPr>
-                        <a:t>Frequency Array [ Hz[] ]</a:t>
+                        <a:t>F2 Frequencies [Hz]</a:t>
                       </a:r>
                     </a:p>
                   </a:txBody>
@@ -4064,7 +4064,7 @@
                             </a:schemeClr>
                           </a:solidFill>
                         </a:rPr>
-                        <a:t>Sweep Duration [s]</a:t>
+                        <a:t>L1 [dB]</a:t>
                       </a:r>
                     </a:p>
                   </a:txBody>
@@ -4121,7 +4121,7 @@
                             </a:schemeClr>
                           </a:solidFill>
                         </a:rPr>
-                        <a:t>Window Duration [s]</a:t>
+                        <a:t>L2 [dB]</a:t>
                       </a:r>
                     </a:p>
                   </a:txBody>
@@ -4161,120 +4161,6 @@
                 <a:extLst>
                   <a:ext uri="{0D108BD9-81ED-4DB2-BD59-A6C34878D82A}">
                     <a16:rowId xmlns:a16="http://schemas.microsoft.com/office/drawing/2014/main" val="328923842"/>
-                  </a:ext>
-                </a:extLst>
-              </a:tr>
-              <a:tr h="281251">
-                <a:tc>
-                  <a:txBody>
-                    <a:bodyPr/>
-                    <a:lstStyle/>
-                    <a:p>
-                      <a:r>
-                        <a:rPr lang="en-US" sz="1400" dirty="0">
-                          <a:solidFill>
-                            <a:schemeClr val="bg2">
-                              <a:lumMod val="25000"/>
-                            </a:schemeClr>
-                          </a:solidFill>
-                        </a:rPr>
-                        <a:t>Minimum Num Sweeps</a:t>
-                      </a:r>
-                    </a:p>
-                  </a:txBody>
-                  <a:tcPr>
-                    <a:solidFill>
-                      <a:schemeClr val="bg1">
-                        <a:lumMod val="85000"/>
-                      </a:schemeClr>
-                    </a:solidFill>
-                  </a:tcPr>
-                </a:tc>
-                <a:tc>
-                  <a:txBody>
-                    <a:bodyPr/>
-                    <a:lstStyle/>
-                    <a:p>
-                      <a:r>
-                        <a:rPr lang="en-US" sz="1400" dirty="0">
-                          <a:solidFill>
-                            <a:schemeClr val="bg2">
-                              <a:lumMod val="25000"/>
-                            </a:schemeClr>
-                          </a:solidFill>
-                        </a:rPr>
-                        <a:t>[MinSweeps]</a:t>
-                      </a:r>
-                    </a:p>
-                  </a:txBody>
-                  <a:tcPr>
-                    <a:solidFill>
-                      <a:schemeClr val="bg1">
-                        <a:lumMod val="85000"/>
-                      </a:schemeClr>
-                    </a:solidFill>
-                  </a:tcPr>
-                </a:tc>
-                <a:extLst>
-                  <a:ext uri="{0D108BD9-81ED-4DB2-BD59-A6C34878D82A}">
-                    <a16:rowId xmlns:a16="http://schemas.microsoft.com/office/drawing/2014/main" val="2397434598"/>
-                  </a:ext>
-                </a:extLst>
-              </a:tr>
-              <a:tr h="281251">
-                <a:tc>
-                  <a:txBody>
-                    <a:bodyPr/>
-                    <a:lstStyle/>
-                    <a:p>
-                      <a:r>
-                        <a:rPr lang="en-US" sz="1400" dirty="0">
-                          <a:solidFill>
-                            <a:schemeClr val="bg2">
-                              <a:lumMod val="25000"/>
-                            </a:schemeClr>
-                          </a:solidFill>
-                        </a:rPr>
-                        <a:t>Maximum Num Sweeps</a:t>
-                      </a:r>
-                    </a:p>
-                  </a:txBody>
-                  <a:tcPr>
-                    <a:solidFill>
-                      <a:schemeClr val="bg1">
-                        <a:lumMod val="85000"/>
-                      </a:schemeClr>
-                    </a:solidFill>
-                  </a:tcPr>
-                </a:tc>
-                <a:tc>
-                  <a:txBody>
-                    <a:bodyPr/>
-                    <a:lstStyle/>
-                    <a:p>
-                      <a:r>
-                        <a:rPr lang="en-US" sz="1400" dirty="0">
-                          <a:solidFill>
-                            <a:schemeClr val="bg2">
-                              <a:lumMod val="25000"/>
-                            </a:schemeClr>
-                          </a:solidFill>
-                        </a:rPr>
-                        <a:t>[MaxSweeps]</a:t>
-                      </a:r>
-                    </a:p>
-                  </a:txBody>
-                  <a:tcPr>
-                    <a:solidFill>
-                      <a:schemeClr val="bg1">
-                        <a:lumMod val="85000"/>
-                      </a:schemeClr>
-                    </a:solidFill>
-                  </a:tcPr>
-                </a:tc>
-                <a:extLst>
-                  <a:ext uri="{0D108BD9-81ED-4DB2-BD59-A6C34878D82A}">
-                    <a16:rowId xmlns:a16="http://schemas.microsoft.com/office/drawing/2014/main" val="3148996428"/>
                   </a:ext>
                 </a:extLst>
               </a:tr>
@@ -4397,9 +4283,9 @@
         </p:nvGrpSpPr>
         <p:grpSpPr>
           <a:xfrm>
-            <a:off x="3142442" y="120445"/>
+            <a:off x="2940407" y="-198782"/>
             <a:ext cx="5867785" cy="6617110"/>
-            <a:chOff x="3142442" y="120445"/>
+            <a:chOff x="3090235" y="120445"/>
             <a:chExt cx="5867785" cy="6617110"/>
           </a:xfrm>
         </p:grpSpPr>
@@ -4417,9 +4303,9 @@
           </p:nvGrpSpPr>
           <p:grpSpPr>
             <a:xfrm>
-              <a:off x="3142442" y="120445"/>
+              <a:off x="3090235" y="120445"/>
               <a:ext cx="5867785" cy="6617110"/>
-              <a:chOff x="3142601" y="108155"/>
+              <a:chOff x="3090394" y="108155"/>
               <a:chExt cx="5867785" cy="6617110"/>
             </a:xfrm>
           </p:grpSpPr>
@@ -4489,9 +4375,9 @@
             </p:nvGrpSpPr>
             <p:grpSpPr>
               <a:xfrm>
-                <a:off x="3142601" y="108155"/>
+                <a:off x="3090394" y="108155"/>
                 <a:ext cx="5867785" cy="6617110"/>
-                <a:chOff x="3142601" y="108155"/>
+                <a:chOff x="3090394" y="108155"/>
                 <a:chExt cx="5867785" cy="6617110"/>
               </a:xfrm>
             </p:grpSpPr>
@@ -4602,7 +4488,7 @@
               </p:nvSpPr>
               <p:spPr>
                 <a:xfrm>
-                  <a:off x="3142601" y="108155"/>
+                  <a:off x="3090394" y="108155"/>
                   <a:ext cx="5867785" cy="6617110"/>
                 </a:xfrm>
                 <a:prstGeom prst="rect">
@@ -4732,7 +4618,7 @@
                       <a:ea typeface="+mn-ea"/>
                       <a:cs typeface="+mn-cs"/>
                     </a:rPr>
-                    <a:t>Title: “DPGRAM” </a:t>
+                    <a:t>Title: “DP-gram” </a:t>
                   </a:r>
                   <a:endParaRPr lang="en-US" b="1" dirty="0"/>
                 </a:p>
@@ -5056,151 +4942,6 @@
             </a:p>
           </p:txBody>
         </p:sp>
-        <p:pic>
-          <p:nvPicPr>
-            <p:cNvPr id="17" name="Picture 16">
-              <a:extLst>
-                <a:ext uri="{FF2B5EF4-FFF2-40B4-BE49-F238E27FC236}">
-                  <a16:creationId xmlns:a16="http://schemas.microsoft.com/office/drawing/2014/main" id="{896BA1FF-F271-64E6-68D6-A07375F18B62}"/>
-                </a:ext>
-              </a:extLst>
-            </p:cNvPr>
-            <p:cNvPicPr>
-              <a:picLocks noChangeAspect="1"/>
-            </p:cNvPicPr>
-            <p:nvPr/>
-          </p:nvPicPr>
-          <p:blipFill>
-            <a:blip r:embed="rId4">
-              <a:extLst>
-                <a:ext uri="{28A0092B-C50C-407E-A947-70E740481C1C}">
-                  <a14:useLocalDpi xmlns:a14="http://schemas.microsoft.com/office/drawing/2010/main" val="0"/>
-                </a:ext>
-              </a:extLst>
-            </a:blip>
-            <a:srcRect l="575" t="21456" r="6284" b="447"/>
-            <a:stretch/>
-          </p:blipFill>
-          <p:spPr>
-            <a:xfrm>
-              <a:off x="4039468" y="1491716"/>
-              <a:ext cx="3957220" cy="2987416"/>
-            </a:xfrm>
-            <a:prstGeom prst="rect">
-              <a:avLst/>
-            </a:prstGeom>
-            <a:ln>
-              <a:solidFill>
-                <a:schemeClr val="tx1"/>
-              </a:solidFill>
-            </a:ln>
-          </p:spPr>
-        </p:pic>
-        <p:sp>
-          <p:nvSpPr>
-            <p:cNvPr id="13" name="Rectangle 12">
-              <a:extLst>
-                <a:ext uri="{FF2B5EF4-FFF2-40B4-BE49-F238E27FC236}">
-                  <a16:creationId xmlns:a16="http://schemas.microsoft.com/office/drawing/2014/main" id="{2565031A-1428-14DC-3301-DAAEC6E27F92}"/>
-                </a:ext>
-              </a:extLst>
-            </p:cNvPr>
-            <p:cNvSpPr/>
-            <p:nvPr/>
-          </p:nvSpPr>
-          <p:spPr>
-            <a:xfrm>
-              <a:off x="6600074" y="1594980"/>
-              <a:ext cx="1196282" cy="640483"/>
-            </a:xfrm>
-            <a:prstGeom prst="rect">
-              <a:avLst/>
-            </a:prstGeom>
-            <a:solidFill>
-              <a:schemeClr val="bg1"/>
-            </a:solidFill>
-            <a:ln>
-              <a:solidFill>
-                <a:schemeClr val="bg1">
-                  <a:lumMod val="75000"/>
-                </a:schemeClr>
-              </a:solidFill>
-            </a:ln>
-          </p:spPr>
-          <p:style>
-            <a:lnRef idx="2">
-              <a:schemeClr val="accent1">
-                <a:shade val="15000"/>
-              </a:schemeClr>
-            </a:lnRef>
-            <a:fillRef idx="1">
-              <a:schemeClr val="accent1"/>
-            </a:fillRef>
-            <a:effectRef idx="0">
-              <a:schemeClr val="accent1"/>
-            </a:effectRef>
-            <a:fontRef idx="minor">
-              <a:schemeClr val="lt1"/>
-            </a:fontRef>
-          </p:style>
-          <p:txBody>
-            <a:bodyPr rtlCol="0" anchor="ctr"/>
-            <a:lstStyle/>
-            <a:p>
-              <a:r>
-                <a:rPr lang="en-US" sz="900" b="1" dirty="0">
-                  <a:solidFill>
-                    <a:srgbClr val="0070C0"/>
-                  </a:solidFill>
-                </a:rPr>
-                <a:t>O          </a:t>
-              </a:r>
-              <a:r>
-                <a:rPr lang="en-US" sz="900" b="1" dirty="0">
-                  <a:solidFill>
-                    <a:schemeClr val="tx1"/>
-                  </a:solidFill>
-                </a:rPr>
-                <a:t>DPOAE</a:t>
-              </a:r>
-              <a:endParaRPr lang="en-US" sz="900" b="1" dirty="0">
-                <a:solidFill>
-                  <a:srgbClr val="0070C0"/>
-                </a:solidFill>
-              </a:endParaRPr>
-            </a:p>
-            <a:p>
-              <a:endParaRPr lang="en-US" sz="900" dirty="0">
-                <a:solidFill>
-                  <a:srgbClr val="0070C0"/>
-                </a:solidFill>
-              </a:endParaRPr>
-            </a:p>
-            <a:p>
-              <a:r>
-                <a:rPr lang="en-US" sz="900" b="1" dirty="0">
-                  <a:solidFill>
-                    <a:srgbClr val="C00000"/>
-                  </a:solidFill>
-                </a:rPr>
-                <a:t>X          </a:t>
-              </a:r>
-              <a:r>
-                <a:rPr lang="en-US" sz="900" b="1" dirty="0">
-                  <a:solidFill>
-                    <a:schemeClr val="tx1"/>
-                  </a:solidFill>
-                </a:rPr>
-                <a:t>NOISE</a:t>
-              </a:r>
-              <a:endParaRPr lang="en-US" sz="900" b="1" dirty="0">
-                <a:solidFill>
-                  <a:srgbClr val="C00000"/>
-                </a:solidFill>
-              </a:endParaRPr>
-            </a:p>
-          </p:txBody>
-        </p:sp>
         <p:sp>
           <p:nvSpPr>
             <p:cNvPr id="15" name="Rectangle 14">
@@ -5309,405 +5050,38 @@
             </a:p>
           </p:txBody>
         </p:sp>
-        <p:pic>
-          <p:nvPicPr>
-            <p:cNvPr id="23" name="Picture 22">
-              <a:extLst>
-                <a:ext uri="{FF2B5EF4-FFF2-40B4-BE49-F238E27FC236}">
-                  <a16:creationId xmlns:a16="http://schemas.microsoft.com/office/drawing/2014/main" id="{8361E361-0E6C-37E7-B2B8-5EA6CA751E99}"/>
-                </a:ext>
-              </a:extLst>
-            </p:cNvPr>
-            <p:cNvPicPr>
-              <a:picLocks noChangeAspect="1"/>
-            </p:cNvPicPr>
-            <p:nvPr/>
-          </p:nvPicPr>
-          <p:blipFill>
-            <a:blip r:embed="rId5"/>
-            <a:stretch>
-              <a:fillRect/>
-            </a:stretch>
-          </p:blipFill>
-          <p:spPr>
-            <a:xfrm>
-              <a:off x="4079202" y="2074887"/>
-              <a:ext cx="261668" cy="1626079"/>
-            </a:xfrm>
-            <a:prstGeom prst="rect">
-              <a:avLst/>
-            </a:prstGeom>
-          </p:spPr>
-        </p:pic>
-        <p:cxnSp>
-          <p:nvCxnSpPr>
-            <p:cNvPr id="27" name="Straight Connector 26">
-              <a:extLst>
-                <a:ext uri="{FF2B5EF4-FFF2-40B4-BE49-F238E27FC236}">
-                  <a16:creationId xmlns:a16="http://schemas.microsoft.com/office/drawing/2014/main" id="{4CED889C-5D23-2D61-E3A7-E444720AB004}"/>
-                </a:ext>
-              </a:extLst>
-            </p:cNvPr>
-            <p:cNvCxnSpPr/>
-            <p:nvPr/>
-          </p:nvCxnSpPr>
-          <p:spPr>
-            <a:xfrm flipH="1">
-              <a:off x="6359097" y="4479132"/>
-              <a:ext cx="895718" cy="0"/>
-            </a:xfrm>
-            <a:prstGeom prst="line">
-              <a:avLst/>
-            </a:prstGeom>
-            <a:ln w="12700"/>
-          </p:spPr>
-          <p:style>
-            <a:lnRef idx="2">
-              <a:schemeClr val="dk1"/>
-            </a:lnRef>
-            <a:fillRef idx="0">
-              <a:schemeClr val="dk1"/>
-            </a:fillRef>
-            <a:effectRef idx="1">
-              <a:schemeClr val="dk1"/>
-            </a:effectRef>
-            <a:fontRef idx="minor">
-              <a:schemeClr val="tx1"/>
-            </a:fontRef>
-          </p:style>
-        </p:cxnSp>
-        <p:sp>
-          <p:nvSpPr>
-            <p:cNvPr id="29" name="Rectangle 28">
-              <a:extLst>
-                <a:ext uri="{FF2B5EF4-FFF2-40B4-BE49-F238E27FC236}">
-                  <a16:creationId xmlns:a16="http://schemas.microsoft.com/office/drawing/2014/main" id="{74590467-BED6-E84D-8D50-960D991E4977}"/>
-                </a:ext>
-              </a:extLst>
-            </p:cNvPr>
-            <p:cNvSpPr/>
-            <p:nvPr/>
-          </p:nvSpPr>
-          <p:spPr>
-            <a:xfrm>
-              <a:off x="4364968" y="4123426"/>
-              <a:ext cx="3588590" cy="141512"/>
-            </a:xfrm>
-            <a:prstGeom prst="rect">
-              <a:avLst/>
-            </a:prstGeom>
-            <a:solidFill>
-              <a:schemeClr val="bg1"/>
-            </a:solidFill>
-            <a:ln>
-              <a:solidFill>
-                <a:schemeClr val="bg1"/>
-              </a:solidFill>
-            </a:ln>
-          </p:spPr>
-          <p:style>
-            <a:lnRef idx="2">
-              <a:schemeClr val="accent1">
-                <a:shade val="15000"/>
-              </a:schemeClr>
-            </a:lnRef>
-            <a:fillRef idx="1">
-              <a:schemeClr val="accent1"/>
-            </a:fillRef>
-            <a:effectRef idx="0">
-              <a:schemeClr val="accent1"/>
-            </a:effectRef>
-            <a:fontRef idx="minor">
-              <a:schemeClr val="lt1"/>
-            </a:fontRef>
-          </p:style>
-          <p:txBody>
-            <a:bodyPr rtlCol="0" anchor="ctr"/>
-            <a:lstStyle/>
-            <a:p>
-              <a:pPr algn="ctr"/>
-              <a:endParaRPr lang="en-US"/>
-            </a:p>
-          </p:txBody>
-        </p:sp>
-        <p:sp>
-          <p:nvSpPr>
-            <p:cNvPr id="28" name="TextBox 27">
-              <a:extLst>
-                <a:ext uri="{FF2B5EF4-FFF2-40B4-BE49-F238E27FC236}">
-                  <a16:creationId xmlns:a16="http://schemas.microsoft.com/office/drawing/2014/main" id="{F7F157F4-28D8-2958-B2F2-49C6F4D5E7B8}"/>
-                </a:ext>
-              </a:extLst>
-            </p:cNvPr>
-            <p:cNvSpPr txBox="1"/>
-            <p:nvPr/>
-          </p:nvSpPr>
-          <p:spPr>
-            <a:xfrm>
-              <a:off x="4365599" y="4086718"/>
-              <a:ext cx="489922" cy="261610"/>
-            </a:xfrm>
-            <a:prstGeom prst="rect">
-              <a:avLst/>
-            </a:prstGeom>
-            <a:noFill/>
-          </p:spPr>
-          <p:txBody>
-            <a:bodyPr wrap="square" rtlCol="0">
-              <a:spAutoFit/>
-            </a:bodyPr>
-            <a:lstStyle/>
-            <a:p>
-              <a:r>
-                <a:rPr lang="en-US" sz="1100" dirty="0">
-                  <a:latin typeface="+mj-lt"/>
-                </a:rPr>
-                <a:t>500</a:t>
-              </a:r>
-              <a:endParaRPr lang="en-US" sz="1050" dirty="0">
-                <a:latin typeface="+mj-lt"/>
-              </a:endParaRPr>
-            </a:p>
-          </p:txBody>
-        </p:sp>
-        <p:sp>
-          <p:nvSpPr>
-            <p:cNvPr id="30" name="TextBox 29">
-              <a:extLst>
-                <a:ext uri="{FF2B5EF4-FFF2-40B4-BE49-F238E27FC236}">
-                  <a16:creationId xmlns:a16="http://schemas.microsoft.com/office/drawing/2014/main" id="{E009F830-5BEE-5093-48C6-73D6C67ECF9F}"/>
-                </a:ext>
-              </a:extLst>
-            </p:cNvPr>
-            <p:cNvSpPr txBox="1"/>
-            <p:nvPr/>
-          </p:nvSpPr>
-          <p:spPr>
-            <a:xfrm>
-              <a:off x="5063783" y="4061128"/>
-              <a:ext cx="348519" cy="261610"/>
-            </a:xfrm>
-            <a:prstGeom prst="rect">
-              <a:avLst/>
-            </a:prstGeom>
-            <a:noFill/>
-          </p:spPr>
-          <p:txBody>
-            <a:bodyPr wrap="square" rtlCol="0">
-              <a:spAutoFit/>
-            </a:bodyPr>
-            <a:lstStyle/>
-            <a:p>
-              <a:r>
-                <a:rPr lang="en-US" sz="1100" dirty="0">
-                  <a:latin typeface="+mj-lt"/>
-                </a:rPr>
-                <a:t>1k</a:t>
-              </a:r>
-              <a:endParaRPr lang="en-US" sz="1050" dirty="0">
-                <a:latin typeface="+mj-lt"/>
-              </a:endParaRPr>
-            </a:p>
-          </p:txBody>
-        </p:sp>
-        <p:sp>
-          <p:nvSpPr>
-            <p:cNvPr id="31" name="TextBox 30">
-              <a:extLst>
-                <a:ext uri="{FF2B5EF4-FFF2-40B4-BE49-F238E27FC236}">
-                  <a16:creationId xmlns:a16="http://schemas.microsoft.com/office/drawing/2014/main" id="{1E02A35B-CDC0-081F-4389-A6AB755922B3}"/>
-                </a:ext>
-              </a:extLst>
-            </p:cNvPr>
-            <p:cNvSpPr txBox="1"/>
-            <p:nvPr/>
-          </p:nvSpPr>
-          <p:spPr>
-            <a:xfrm>
-              <a:off x="5719581" y="4060249"/>
-              <a:ext cx="382006" cy="261610"/>
-            </a:xfrm>
-            <a:prstGeom prst="rect">
-              <a:avLst/>
-            </a:prstGeom>
-            <a:noFill/>
-          </p:spPr>
-          <p:txBody>
-            <a:bodyPr wrap="square" rtlCol="0">
-              <a:spAutoFit/>
-            </a:bodyPr>
-            <a:lstStyle/>
-            <a:p>
-              <a:r>
-                <a:rPr lang="en-US" sz="1100" dirty="0">
-                  <a:latin typeface="+mj-lt"/>
-                </a:rPr>
-                <a:t>2k</a:t>
-              </a:r>
-              <a:endParaRPr lang="en-US" sz="1050" dirty="0">
-                <a:latin typeface="+mj-lt"/>
-              </a:endParaRPr>
-            </a:p>
-          </p:txBody>
-        </p:sp>
-        <p:sp>
-          <p:nvSpPr>
-            <p:cNvPr id="32" name="TextBox 31">
-              <a:extLst>
-                <a:ext uri="{FF2B5EF4-FFF2-40B4-BE49-F238E27FC236}">
-                  <a16:creationId xmlns:a16="http://schemas.microsoft.com/office/drawing/2014/main" id="{F5068E25-AC7A-8F6B-3150-3FDA506ED7A1}"/>
-                </a:ext>
-              </a:extLst>
-            </p:cNvPr>
-            <p:cNvSpPr txBox="1"/>
-            <p:nvPr/>
-          </p:nvSpPr>
-          <p:spPr>
-            <a:xfrm>
-              <a:off x="6388315" y="4053135"/>
-              <a:ext cx="332693" cy="261610"/>
-            </a:xfrm>
-            <a:prstGeom prst="rect">
-              <a:avLst/>
-            </a:prstGeom>
-            <a:noFill/>
-          </p:spPr>
-          <p:txBody>
-            <a:bodyPr wrap="square" rtlCol="0">
-              <a:spAutoFit/>
-            </a:bodyPr>
-            <a:lstStyle/>
-            <a:p>
-              <a:r>
-                <a:rPr lang="en-US" sz="1100" dirty="0">
-                  <a:latin typeface="+mj-lt"/>
-                </a:rPr>
-                <a:t>4k</a:t>
-              </a:r>
-              <a:endParaRPr lang="en-US" sz="1050" dirty="0">
-                <a:latin typeface="+mj-lt"/>
-              </a:endParaRPr>
-            </a:p>
-          </p:txBody>
-        </p:sp>
-        <p:sp>
-          <p:nvSpPr>
-            <p:cNvPr id="33" name="TextBox 32">
-              <a:extLst>
-                <a:ext uri="{FF2B5EF4-FFF2-40B4-BE49-F238E27FC236}">
-                  <a16:creationId xmlns:a16="http://schemas.microsoft.com/office/drawing/2014/main" id="{8F5F8CDF-964A-629D-43BC-CAE9AF3B0564}"/>
-                </a:ext>
-              </a:extLst>
-            </p:cNvPr>
-            <p:cNvSpPr txBox="1"/>
-            <p:nvPr/>
-          </p:nvSpPr>
-          <p:spPr>
-            <a:xfrm>
-              <a:off x="7048672" y="4041732"/>
-              <a:ext cx="332693" cy="261610"/>
-            </a:xfrm>
-            <a:prstGeom prst="rect">
-              <a:avLst/>
-            </a:prstGeom>
-            <a:noFill/>
-          </p:spPr>
-          <p:txBody>
-            <a:bodyPr wrap="square" rtlCol="0">
-              <a:spAutoFit/>
-            </a:bodyPr>
-            <a:lstStyle/>
-            <a:p>
-              <a:r>
-                <a:rPr lang="en-US" sz="1100" dirty="0">
-                  <a:latin typeface="+mj-lt"/>
-                </a:rPr>
-                <a:t>8k</a:t>
-              </a:r>
-              <a:endParaRPr lang="en-US" sz="1050" dirty="0">
-                <a:latin typeface="+mj-lt"/>
-              </a:endParaRPr>
-            </a:p>
-          </p:txBody>
-        </p:sp>
-        <p:sp>
-          <p:nvSpPr>
-            <p:cNvPr id="34" name="TextBox 33">
-              <a:extLst>
-                <a:ext uri="{FF2B5EF4-FFF2-40B4-BE49-F238E27FC236}">
-                  <a16:creationId xmlns:a16="http://schemas.microsoft.com/office/drawing/2014/main" id="{A77E979E-FE15-9C62-9A29-D7FC14187514}"/>
-                </a:ext>
-              </a:extLst>
-            </p:cNvPr>
-            <p:cNvSpPr txBox="1"/>
-            <p:nvPr/>
-          </p:nvSpPr>
-          <p:spPr>
-            <a:xfrm>
-              <a:off x="7629461" y="4041732"/>
-              <a:ext cx="433971" cy="261610"/>
-            </a:xfrm>
-            <a:prstGeom prst="rect">
-              <a:avLst/>
-            </a:prstGeom>
-            <a:noFill/>
-          </p:spPr>
-          <p:txBody>
-            <a:bodyPr wrap="square" rtlCol="0">
-              <a:spAutoFit/>
-            </a:bodyPr>
-            <a:lstStyle/>
-            <a:p>
-              <a:r>
-                <a:rPr lang="en-US" sz="1100" dirty="0">
-                  <a:latin typeface="+mj-lt"/>
-                </a:rPr>
-                <a:t>16k</a:t>
-              </a:r>
-              <a:endParaRPr lang="en-US" sz="1050" dirty="0">
-                <a:latin typeface="+mj-lt"/>
-              </a:endParaRPr>
-            </a:p>
-          </p:txBody>
-        </p:sp>
-        <p:sp>
-          <p:nvSpPr>
-            <p:cNvPr id="19" name="TextBox 18">
-              <a:extLst>
-                <a:ext uri="{FF2B5EF4-FFF2-40B4-BE49-F238E27FC236}">
-                  <a16:creationId xmlns:a16="http://schemas.microsoft.com/office/drawing/2014/main" id="{9EC163EB-6A24-156D-1AEF-32E314BF12D5}"/>
-                </a:ext>
-              </a:extLst>
-            </p:cNvPr>
-            <p:cNvSpPr txBox="1"/>
-            <p:nvPr/>
-          </p:nvSpPr>
-          <p:spPr>
-            <a:xfrm>
-              <a:off x="5039419" y="4253209"/>
-              <a:ext cx="703911" cy="292388"/>
-            </a:xfrm>
-            <a:prstGeom prst="rect">
-              <a:avLst/>
-            </a:prstGeom>
-            <a:noFill/>
-          </p:spPr>
-          <p:txBody>
-            <a:bodyPr wrap="none" rtlCol="0">
-              <a:spAutoFit/>
-            </a:bodyPr>
-            <a:lstStyle/>
-            <a:p>
-              <a:r>
-                <a:rPr lang="en-US" sz="1300" dirty="0">
-                  <a:latin typeface="+mj-lt"/>
-                </a:rPr>
-                <a:t>DPOAE</a:t>
-              </a:r>
-            </a:p>
-          </p:txBody>
-        </p:sp>
       </p:grpSp>
+      <p:pic>
+        <p:nvPicPr>
+          <p:cNvPr id="21" name="Picture 20">
+            <a:extLst>
+              <a:ext uri="{FF2B5EF4-FFF2-40B4-BE49-F238E27FC236}">
+                <a16:creationId xmlns:a16="http://schemas.microsoft.com/office/drawing/2014/main" id="{EDB612F1-87AD-2D98-3026-A53187457ACD}"/>
+              </a:ext>
+            </a:extLst>
+          </p:cNvPr>
+          <p:cNvPicPr>
+            <a:picLocks noChangeAspect="1"/>
+          </p:cNvPicPr>
+          <p:nvPr/>
+        </p:nvPicPr>
+        <p:blipFill>
+          <a:blip r:embed="rId4"/>
+          <a:srcRect t="8143"/>
+          <a:stretch>
+            <a:fillRect/>
+          </a:stretch>
+        </p:blipFill>
+        <p:spPr>
+          <a:xfrm>
+            <a:off x="3634002" y="1283305"/>
+            <a:ext cx="4049067" cy="2789515"/>
+          </a:xfrm>
+          <a:prstGeom prst="rect">
+            <a:avLst/>
+          </a:prstGeom>
+        </p:spPr>
+      </p:pic>
     </p:spTree>
     <p:extLst>
       <p:ext uri="{BB962C8B-B14F-4D97-AF65-F5344CB8AC3E}">
@@ -5752,7 +5126,7 @@
         </p:nvGrpSpPr>
         <p:grpSpPr>
           <a:xfrm>
-            <a:off x="3162107" y="120445"/>
+            <a:off x="3162107" y="0"/>
             <a:ext cx="5867785" cy="6617110"/>
             <a:chOff x="3162107" y="120445"/>
             <a:chExt cx="5867785" cy="6617110"/>
@@ -6039,7 +5413,7 @@
                       <a:ea typeface="+mn-ea"/>
                       <a:cs typeface="+mn-cs"/>
                     </a:rPr>
-                    <a:t>Results: Swept DPOAE</a:t>
+                    <a:t>Results: DP-gram</a:t>
                   </a:r>
                   <a:endParaRPr lang="en-US" b="1" dirty="0"/>
                 </a:p>
@@ -6180,14 +5554,15 @@
           </p:nvPicPr>
           <p:blipFill>
             <a:blip r:embed="rId4"/>
+            <a:srcRect t="8169"/>
             <a:stretch>
               <a:fillRect/>
             </a:stretch>
           </p:blipFill>
           <p:spPr>
             <a:xfrm>
-              <a:off x="3345212" y="1363570"/>
-              <a:ext cx="5503333" cy="4127500"/>
+              <a:off x="3345212" y="1700766"/>
+              <a:ext cx="5503333" cy="3790303"/>
             </a:xfrm>
             <a:prstGeom prst="rect">
               <a:avLst/>
